--- a/课件/C1/C1-B-02/C1-B-02.pptx
+++ b/课件/C1/C1-B-02/C1-B-02.pptx
@@ -19,9 +19,10 @@
     <p:sldId id="267" r:id="rId13"/>
     <p:sldId id="268" r:id="rId14"/>
     <p:sldId id="269" r:id="rId15"/>
+    <p:sldId id="270" r:id="rId16"/>
   </p:sldIdLst>
   <p:notesMasterIdLst>
-    <p:notesMasterId r:id="rId16"/>
+    <p:notesMasterId r:id="rId17"/>
   </p:notesMasterIdLst>
   <p:sldSz cx="12191695" cy="6858000"/>
   <p:notesSz cx="6858000" cy="12191695"/>
@@ -979,6 +980,94 @@
             <a:fld id="{F7021451-1387-4CA6-816F-3879F97B5CBC}" type="slidenum">
               <a:rPr lang="en-US"/>
               <a:t>14</a:t>
+            </a:fld>
+            <a:endParaRPr lang="en-US"/>
+          </a:p>
+        </p:txBody>
+      </p:sp>
+    </p:spTree>
+    <p:extLst>
+      <p:ext uri="{BB962C8B-B14F-4D97-AF65-F5344CB8AC3E}">
+        <p14:creationId xmlns:p14="http://schemas.microsoft.com/office/powerpoint/2010/main" val="1024086991"/>
+      </p:ext>
+    </p:extLst>
+  </p:cSld>
+  <p:clrMapOvr>
+    <a:masterClrMapping/>
+  </p:clrMapOvr>
+</p:notes>
+</file>
+
+<file path=ppt/notesSlides/notesSlide15.xml><?xml version="1.0" encoding="utf-8"?>
+<p:notes xmlns:a="http://schemas.openxmlformats.org/drawingml/2006/main" xmlns:r="http://schemas.openxmlformats.org/officeDocument/2006/relationships" xmlns:p="http://schemas.openxmlformats.org/presentationml/2006/main">
+  <p:cSld>
+    <p:spTree>
+      <p:nvGrpSpPr>
+        <p:cNvPr id="1" name=""/>
+        <p:cNvGrpSpPr/>
+        <p:nvPr/>
+      </p:nvGrpSpPr>
+      <p:grpSpPr>
+        <a:xfrm>
+          <a:off x="0" y="0"/>
+          <a:ext cx="0" cy="0"/>
+          <a:chOff x="0" y="0"/>
+          <a:chExt cx="0" cy="0"/>
+        </a:xfrm>
+      </p:grpSpPr>
+      <p:sp>
+        <p:nvSpPr>
+          <p:cNvPr id="2" name="Slide Image Placeholder 1"/>
+          <p:cNvSpPr>
+            <a:spLocks noGrp="1" noRot="1" noChangeAspect="1"/>
+          </p:cNvSpPr>
+          <p:nvPr>
+            <p:ph type="sldImg"/>
+          </p:nvPr>
+        </p:nvSpPr>
+        <p:spPr/>
+      </p:sp>
+      <p:sp>
+        <p:nvSpPr>
+          <p:cNvPr id="3" name="Notes Placeholder 2"/>
+          <p:cNvSpPr>
+            <a:spLocks noGrp="1"/>
+          </p:cNvSpPr>
+          <p:nvPr>
+            <p:ph type="body" idx="1"/>
+          </p:nvPr>
+        </p:nvSpPr>
+        <p:spPr/>
+        <p:txBody>
+          <a:bodyPr/>
+          <a:lstStyle/>
+          <a:p>
+            <a:r>
+              <a:rPr lang="en-US" dirty="0"/>
+              <a:t/>
+            </a:r>
+            <a:endParaRPr lang="en-US" dirty="0"/>
+          </a:p>
+        </p:txBody>
+      </p:sp>
+      <p:sp>
+        <p:nvSpPr>
+          <p:cNvPr id="4" name="Slide Number Placeholder 3"/>
+          <p:cNvSpPr>
+            <a:spLocks noGrp="1"/>
+          </p:cNvSpPr>
+          <p:nvPr>
+            <p:ph type="sldNum" sz="quarter" idx="10"/>
+          </p:nvPr>
+        </p:nvSpPr>
+        <p:spPr/>
+        <p:txBody>
+          <a:bodyPr/>
+          <a:lstStyle/>
+          <a:p>
+            <a:fld id="{F7021451-1387-4CA6-816F-3879F97B5CBC}" type="slidenum">
+              <a:rPr lang="en-US"/>
+              <a:t>15</a:t>
             </a:fld>
             <a:endParaRPr lang="en-US"/>
           </a:p>
@@ -2072,7 +2161,7 @@
                 <a:ea typeface="微软雅黑" pitchFamily="34" charset="-122"/>
                 <a:cs typeface="微软雅黑" pitchFamily="34" charset="-120"/>
               </a:rPr>
-              <a:t>1 / 14</a:t>
+              <a:t>1 / 15</a:t>
             </a:r>
             <a:endParaRPr lang="en-US" sz="1000" dirty="0"/>
           </a:p>
@@ -2306,7 +2395,7 @@
                 <a:ea typeface="微软雅黑" pitchFamily="34" charset="-122"/>
                 <a:cs typeface="微软雅黑" pitchFamily="34" charset="-120"/>
               </a:rPr>
-              <a:t>10 / 14</a:t>
+              <a:t>10 / 15</a:t>
             </a:r>
             <a:endParaRPr lang="en-US" sz="1000" dirty="0"/>
           </a:p>
@@ -2345,7 +2434,7 @@
                 <a:ea typeface="微软雅黑" pitchFamily="34" charset="-122"/>
                 <a:cs typeface="微软雅黑" pitchFamily="34" charset="-120"/>
               </a:rPr>
-              <a:t>本节难忘时刻</a:t>
+              <a:t>规矩</a:t>
             </a:r>
             <a:endParaRPr lang="en-US" sz="1400" dirty="0"/>
           </a:p>
@@ -2384,7 +2473,7 @@
                 <a:ea typeface="微软雅黑" pitchFamily="34" charset="-122"/>
                 <a:cs typeface="微软雅黑" pitchFamily="34" charset="-120"/>
               </a:rPr>
-              <a:t>越界：踩进了别人的格子</a:t>
+              <a:t>越界规矩：最大下标是n-1</a:t>
             </a:r>
             <a:endParaRPr lang="en-US" sz="2800" dirty="0"/>
           </a:p>
@@ -2392,28 +2481,59 @@
       </p:sp>
       <p:sp>
         <p:nvSpPr>
-          <p:cNvPr id="5" name="Shape 3"/>
-          <p:cNvSpPr/>
-          <p:nvPr/>
-        </p:nvSpPr>
-        <p:spPr>
-          <a:xfrm>
-            <a:off x="822960" y="2395728"/>
-            <a:ext cx="10545775" cy="1271016"/>
-          </a:xfrm>
-          <a:prstGeom prst="rect">
-            <a:avLst/>
-          </a:prstGeom>
-          <a:solidFill>
-            <a:srgbClr val="F5F6F7"/>
-          </a:solidFill>
-          <a:ln w="9525">
-            <a:solidFill>
-              <a:srgbClr val="D8DBE0"/>
-            </a:solidFill>
-            <a:prstDash val="solid"/>
-          </a:ln>
-        </p:spPr>
+          <p:cNvPr id="5" name="Text 3"/>
+          <p:cNvSpPr/>
+          <p:nvPr/>
+        </p:nvSpPr>
+        <p:spPr>
+          <a:xfrm>
+            <a:off x="896112" y="2395728"/>
+            <a:ext cx="10454335" cy="397764"/>
+          </a:xfrm>
+          <a:prstGeom prst="rect">
+            <a:avLst/>
+          </a:prstGeom>
+          <a:noFill/>
+          <a:ln/>
+        </p:spPr>
+        <p:txBody>
+          <a:bodyPr wrap="square" rtlCol="0" anchor="t"/>
+          <a:lstStyle/>
+          <a:p>
+            <a:pPr algn="l" indent="0" marL="0">
+              <a:lnSpc>
+                <a:spcPct val="115000"/>
+              </a:lnSpc>
+              <a:buNone/>
+            </a:pPr>
+            <a:r>
+              <a:rPr lang="en-US" sz="1800" b="1" dirty="0">
+                <a:solidFill>
+                  <a:srgbClr val="1F4E9C"/>
+                </a:solidFill>
+                <a:latin typeface="微软雅黑" pitchFamily="34" charset="0"/>
+                <a:ea typeface="微软雅黑" pitchFamily="34" charset="-122"/>
+                <a:cs typeface="微软雅黑" pitchFamily="34" charset="-120"/>
+              </a:rPr>
+              <a:t>•  </a:t>
+            </a:r>
+            <a:pPr algn="l" indent="0" marL="0">
+              <a:lnSpc>
+                <a:spcPct val="115000"/>
+              </a:lnSpc>
+              <a:buNone/>
+            </a:pPr>
+            <a:r>
+              <a:rPr lang="en-US" sz="1800" dirty="0">
+                <a:solidFill>
+                  <a:srgbClr val="000000"/>
+                </a:solidFill>
+              </a:rPr>
+              <a:t>长度是n，下标就是0到n-1，多走一步都是别人的地盘</a:t>
+            </a:r>
+            <a:endParaRPr lang="en-US" sz="1800" dirty="0"/>
+          </a:p>
+        </p:txBody>
       </p:sp>
       <p:sp>
         <p:nvSpPr>
@@ -2423,8 +2543,8 @@
         </p:nvSpPr>
         <p:spPr>
           <a:xfrm>
-            <a:off x="1078992" y="2505456"/>
-            <a:ext cx="10033711" cy="1051560"/>
+            <a:off x="896112" y="2866644"/>
+            <a:ext cx="10454335" cy="397764"/>
           </a:xfrm>
           <a:prstGeom prst="rect">
             <a:avLst/>
@@ -2438,25 +2558,36 @@
           <a:p>
             <a:pPr algn="l" indent="0" marL="0">
               <a:lnSpc>
-                <a:spcPct val="125000"/>
-              </a:lnSpc>
-              <a:buNone/>
-            </a:pPr>
-            <a:r>
-              <a:rPr lang="en-US" sz="1400" dirty="0">
-                <a:solidFill>
-                  <a:srgbClr val="1F2329"/>
-                </a:solidFill>
-                <a:latin typeface="Consolas" pitchFamily="34" charset="0"/>
-                <a:ea typeface="Consolas" pitchFamily="34" charset="-122"/>
-                <a:cs typeface="Consolas" pitchFamily="34" charset="-120"/>
-              </a:rPr>
-              <a:t>int a[5] = {10, 20, 30, 40, 50};
-int b = 100;
-a[5] = 999;           // 没有a[5]这一格：写进了别人的地盘
-</a:t>
-            </a:r>
-            <a:endParaRPr lang="en-US" sz="1400" dirty="0"/>
+                <a:spcPct val="115000"/>
+              </a:lnSpc>
+              <a:buNone/>
+            </a:pPr>
+            <a:r>
+              <a:rPr lang="en-US" sz="1800" b="1" dirty="0">
+                <a:solidFill>
+                  <a:srgbClr val="1F4E9C"/>
+                </a:solidFill>
+                <a:latin typeface="微软雅黑" pitchFamily="34" charset="0"/>
+                <a:ea typeface="微软雅黑" pitchFamily="34" charset="-122"/>
+                <a:cs typeface="微软雅黑" pitchFamily="34" charset="-120"/>
+              </a:rPr>
+              <a:t>•  </a:t>
+            </a:r>
+            <a:pPr algn="l" indent="0" marL="0">
+              <a:lnSpc>
+                <a:spcPct val="115000"/>
+              </a:lnSpc>
+              <a:buNone/>
+            </a:pPr>
+            <a:r>
+              <a:rPr lang="en-US" sz="1800" dirty="0">
+                <a:solidFill>
+                  <a:srgbClr val="000000"/>
+                </a:solidFill>
+              </a:rPr>
+              <a:t>写循环先问一句：这个数组最大下标是多少；条件里默念一遍再落笔</a:t>
+            </a:r>
+            <a:endParaRPr lang="en-US" sz="1800" dirty="0"/>
           </a:p>
         </p:txBody>
       </p:sp>
@@ -2468,7 +2599,7 @@
         </p:nvSpPr>
         <p:spPr>
           <a:xfrm>
-            <a:off x="896112" y="3867912"/>
+            <a:off x="896112" y="3337560"/>
             <a:ext cx="10454335" cy="397764"/>
           </a:xfrm>
           <a:prstGeom prst="rect">
@@ -2510,133 +2641,7 @@
                   <a:srgbClr val="000000"/>
                 </a:solidFill>
               </a:rPr>
-              <a:t>a[5]只有下标0—4这五格，a[5]是第六格——那片内存住着别的变量</a:t>
-            </a:r>
-            <a:endParaRPr lang="en-US" sz="1800" dirty="0"/>
-          </a:p>
-        </p:txBody>
-      </p:sp>
-      <p:sp>
-        <p:nvSpPr>
-          <p:cNvPr id="8" name="Text 6"/>
-          <p:cNvSpPr/>
-          <p:nvPr/>
-        </p:nvSpPr>
-        <p:spPr>
-          <a:xfrm>
-            <a:off x="896112" y="4338828"/>
-            <a:ext cx="10454335" cy="397764"/>
-          </a:xfrm>
-          <a:prstGeom prst="rect">
-            <a:avLst/>
-          </a:prstGeom>
-          <a:noFill/>
-          <a:ln/>
-        </p:spPr>
-        <p:txBody>
-          <a:bodyPr wrap="square" rtlCol="0" anchor="t"/>
-          <a:lstStyle/>
-          <a:p>
-            <a:pPr algn="l" indent="0" marL="0">
-              <a:lnSpc>
-                <a:spcPct val="115000"/>
-              </a:lnSpc>
-              <a:buNone/>
-            </a:pPr>
-            <a:r>
-              <a:rPr lang="en-US" sz="1800" b="1" dirty="0">
-                <a:solidFill>
-                  <a:srgbClr val="1F4E9C"/>
-                </a:solidFill>
-                <a:latin typeface="微软雅黑" pitchFamily="34" charset="0"/>
-                <a:ea typeface="微软雅黑" pitchFamily="34" charset="-122"/>
-                <a:cs typeface="微软雅黑" pitchFamily="34" charset="-120"/>
-              </a:rPr>
-              <a:t>•  </a:t>
-            </a:r>
-            <a:pPr algn="l" indent="0" marL="0">
-              <a:lnSpc>
-                <a:spcPct val="115000"/>
-              </a:lnSpc>
-              <a:buNone/>
-            </a:pPr>
-            <a:r>
-              <a:rPr lang="en-US" sz="1800" dirty="0">
-                <a:solidFill>
-                  <a:srgbClr val="000000"/>
-                </a:solidFill>
-              </a:rPr>
-              <a:t>编译器多半不报错，值被悄悄改掉，错得无声无息</a:t>
-            </a:r>
-            <a:endParaRPr lang="en-US" sz="1800" dirty="0"/>
-          </a:p>
-        </p:txBody>
-      </p:sp>
-      <p:sp>
-        <p:nvSpPr>
-          <p:cNvPr id="9" name="Text 7"/>
-          <p:cNvSpPr/>
-          <p:nvPr/>
-        </p:nvSpPr>
-        <p:spPr>
-          <a:xfrm>
-            <a:off x="896112" y="4809744"/>
-            <a:ext cx="10454335" cy="397764"/>
-          </a:xfrm>
-          <a:prstGeom prst="rect">
-            <a:avLst/>
-          </a:prstGeom>
-          <a:noFill/>
-          <a:ln/>
-        </p:spPr>
-        <p:txBody>
-          <a:bodyPr wrap="square" rtlCol="0" anchor="t"/>
-          <a:lstStyle/>
-          <a:p>
-            <a:pPr algn="l" indent="0" marL="0">
-              <a:lnSpc>
-                <a:spcPct val="115000"/>
-              </a:lnSpc>
-              <a:buNone/>
-            </a:pPr>
-            <a:r>
-              <a:rPr lang="en-US" sz="1800" b="1" dirty="0">
-                <a:solidFill>
-                  <a:srgbClr val="1F4E9C"/>
-                </a:solidFill>
-                <a:latin typeface="微软雅黑" pitchFamily="34" charset="0"/>
-                <a:ea typeface="微软雅黑" pitchFamily="34" charset="-122"/>
-                <a:cs typeface="微软雅黑" pitchFamily="34" charset="-120"/>
-              </a:rPr>
-              <a:t>•  </a:t>
-            </a:r>
-            <a:pPr algn="l" indent="0" marL="0">
-              <a:lnSpc>
-                <a:spcPct val="115000"/>
-              </a:lnSpc>
-              <a:buNone/>
-            </a:pPr>
-            <a:r>
-              <a:rPr lang="en-US" sz="1800" dirty="0">
-                <a:solidFill>
-                  <a:srgbClr val="000000"/>
-                </a:solidFill>
-              </a:rPr>
-              <a:t>越界危险的真正原因：</a:t>
-            </a:r>
-            <a:pPr algn="l" indent="0" marL="0">
-              <a:lnSpc>
-                <a:spcPct val="115000"/>
-              </a:lnSpc>
-              <a:buNone/>
-            </a:pPr>
-            <a:r>
-              <a:rPr lang="en-US" sz="1800" b="1" dirty="0">
-                <a:solidFill>
-                  <a:srgbClr val="000000"/>
-                </a:solidFill>
-              </a:rPr>
-              <a:t>不是程序不让，是那片内存不归你</a:t>
+              <a:t>指针遍历同理：终点是a+n-1，条件写p &lt;= a+n-1</a:t>
             </a:r>
             <a:endParaRPr lang="en-US" sz="1800" dirty="0"/>
           </a:p>
@@ -2714,7 +2719,7 @@
                 <a:ea typeface="微软雅黑" pitchFamily="34" charset="-122"/>
                 <a:cs typeface="微软雅黑" pitchFamily="34" charset="-120"/>
               </a:rPr>
-              <a:t>11 / 14</a:t>
+              <a:t>11 / 15</a:t>
             </a:r>
             <a:endParaRPr lang="en-US" sz="1000" dirty="0"/>
           </a:p>
@@ -2753,7 +2758,7 @@
                 <a:ea typeface="微软雅黑" pitchFamily="34" charset="-122"/>
                 <a:cs typeface="微软雅黑" pitchFamily="34" charset="-120"/>
               </a:rPr>
-              <a:t>规矩</a:t>
+              <a:t>钩子兑现</a:t>
             </a:r>
             <a:endParaRPr lang="en-US" sz="1400" dirty="0"/>
           </a:p>
@@ -2792,7 +2797,7 @@
                 <a:ea typeface="微软雅黑" pitchFamily="34" charset="-122"/>
                 <a:cs typeface="微软雅黑" pitchFamily="34" charset="-120"/>
               </a:rPr>
-              <a:t>越界规矩：最大下标是n-1</a:t>
+              <a:t>scanf吃回车的救法</a:t>
             </a:r>
             <a:endParaRPr lang="en-US" sz="2800" dirty="0"/>
           </a:p>
@@ -2800,13 +2805,100 @@
       </p:sp>
       <p:sp>
         <p:nvSpPr>
-          <p:cNvPr id="5" name="Text 3"/>
-          <p:cNvSpPr/>
-          <p:nvPr/>
-        </p:nvSpPr>
-        <p:spPr>
-          <a:xfrm>
-            <a:off x="896112" y="2395728"/>
+          <p:cNvPr id="5" name="Shape 3"/>
+          <p:cNvSpPr/>
+          <p:nvPr/>
+        </p:nvSpPr>
+        <p:spPr>
+          <a:xfrm>
+            <a:off x="822960" y="2395728"/>
+            <a:ext cx="10545775" cy="1746504"/>
+          </a:xfrm>
+          <a:prstGeom prst="rect">
+            <a:avLst/>
+          </a:prstGeom>
+          <a:solidFill>
+            <a:srgbClr val="F7F9FC"/>
+          </a:solidFill>
+          <a:ln/>
+        </p:spPr>
+      </p:sp>
+      <p:sp>
+        <p:nvSpPr>
+          <p:cNvPr id="6" name="Shape 4"/>
+          <p:cNvSpPr/>
+          <p:nvPr/>
+        </p:nvSpPr>
+        <p:spPr>
+          <a:xfrm>
+            <a:off x="822960" y="2395728"/>
+            <a:ext cx="50292" cy="1746504"/>
+          </a:xfrm>
+          <a:prstGeom prst="rect">
+            <a:avLst/>
+          </a:prstGeom>
+          <a:solidFill>
+            <a:srgbClr val="1F4E9C"/>
+          </a:solidFill>
+          <a:ln/>
+        </p:spPr>
+      </p:sp>
+      <p:sp>
+        <p:nvSpPr>
+          <p:cNvPr id="7" name="Text 5"/>
+          <p:cNvSpPr/>
+          <p:nvPr/>
+        </p:nvSpPr>
+        <p:spPr>
+          <a:xfrm>
+            <a:off x="1078992" y="2505456"/>
+            <a:ext cx="10033711" cy="1527048"/>
+          </a:xfrm>
+          <a:prstGeom prst="rect">
+            <a:avLst/>
+          </a:prstGeom>
+          <a:noFill/>
+          <a:ln/>
+        </p:spPr>
+        <p:txBody>
+          <a:bodyPr wrap="square" rtlCol="0" anchor="t"/>
+          <a:lstStyle/>
+          <a:p>
+            <a:pPr algn="l" indent="0" marL="0">
+              <a:lnSpc>
+                <a:spcPct val="125000"/>
+              </a:lnSpc>
+              <a:buNone/>
+            </a:pPr>
+            <a:r>
+              <a:rPr lang="en-US" sz="1400" dirty="0">
+                <a:solidFill>
+                  <a:srgbClr val="1F2329"/>
+                </a:solidFill>
+                <a:latin typeface="Consolas" pitchFamily="34" charset="0"/>
+                <a:ea typeface="Consolas" pitchFamily="34" charset="-122"/>
+                <a:cs typeface="Consolas" pitchFamily="34" charset="-120"/>
+              </a:rPr>
+              <a:t>int n;
+char ch;
+scanf("%d", &amp;n);
+ch = getchar();       // 收走敲数字留下的回车
+scanf("%c", &amp;ch);     // 或者写成 scanf(" %c", &amp;ch);
+</a:t>
+            </a:r>
+            <a:endParaRPr lang="en-US" sz="1400" dirty="0"/>
+          </a:p>
+        </p:txBody>
+      </p:sp>
+      <p:sp>
+        <p:nvSpPr>
+          <p:cNvPr id="8" name="Text 6"/>
+          <p:cNvSpPr/>
+          <p:nvPr/>
+        </p:nvSpPr>
+        <p:spPr>
+          <a:xfrm>
+            <a:off x="896112" y="4343400"/>
             <a:ext cx="10454335" cy="397764"/>
           </a:xfrm>
           <a:prstGeom prst="rect">
@@ -2848,7 +2940,7 @@
                   <a:srgbClr val="000000"/>
                 </a:solidFill>
               </a:rPr>
-              <a:t>长度是n，下标就是0到n-1，多走一步都是别人的地盘</a:t>
+              <a:t>敲完数字的回车留在缓冲区，被%c收走，看起来像这行被跳过</a:t>
             </a:r>
             <a:endParaRPr lang="en-US" sz="1800" dirty="0"/>
           </a:p>
@@ -2856,13 +2948,13 @@
       </p:sp>
       <p:sp>
         <p:nvSpPr>
-          <p:cNvPr id="6" name="Text 4"/>
-          <p:cNvSpPr/>
-          <p:nvPr/>
-        </p:nvSpPr>
-        <p:spPr>
-          <a:xfrm>
-            <a:off x="896112" y="2866644"/>
+          <p:cNvPr id="9" name="Text 7"/>
+          <p:cNvSpPr/>
+          <p:nvPr/>
+        </p:nvSpPr>
+        <p:spPr>
+          <a:xfrm>
+            <a:off x="896112" y="4814316"/>
             <a:ext cx="10454335" cy="397764"/>
           </a:xfrm>
           <a:prstGeom prst="rect">
@@ -2904,7 +2996,7 @@
                   <a:srgbClr val="000000"/>
                 </a:solidFill>
               </a:rPr>
-              <a:t>写循环先问一句：这个数组最大下标是多少；条件里默念一遍再落笔</a:t>
+              <a:t>两种救法记一种：getchar()收走，或者%c前加空格挡掉空白</a:t>
             </a:r>
             <a:endParaRPr lang="en-US" sz="1800" dirty="0"/>
           </a:p>
@@ -2912,13 +3004,13 @@
       </p:sp>
       <p:sp>
         <p:nvSpPr>
-          <p:cNvPr id="7" name="Text 5"/>
-          <p:cNvSpPr/>
-          <p:nvPr/>
-        </p:nvSpPr>
-        <p:spPr>
-          <a:xfrm>
-            <a:off x="896112" y="3337560"/>
+          <p:cNvPr id="10" name="Text 8"/>
+          <p:cNvSpPr/>
+          <p:nvPr/>
+        </p:nvSpPr>
+        <p:spPr>
+          <a:xfrm>
+            <a:off x="896112" y="5285232"/>
             <a:ext cx="10454335" cy="397764"/>
           </a:xfrm>
           <a:prstGeom prst="rect">
@@ -2960,7 +3052,7 @@
                   <a:srgbClr val="000000"/>
                 </a:solidFill>
               </a:rPr>
-              <a:t>指针遍历同理：终点是a+n-1，条件写p &lt;= a+n-1</a:t>
+              <a:t>这个坑基础阶段留到了今天，现在填完</a:t>
             </a:r>
             <a:endParaRPr lang="en-US" sz="1800" dirty="0"/>
           </a:p>
@@ -3038,7 +3130,7 @@
                 <a:ea typeface="微软雅黑" pitchFamily="34" charset="-122"/>
                 <a:cs typeface="微软雅黑" pitchFamily="34" charset="-120"/>
               </a:rPr>
-              <a:t>12 / 14</a:t>
+              <a:t>12 / 15</a:t>
             </a:r>
             <a:endParaRPr lang="en-US" sz="1000" dirty="0"/>
           </a:p>
@@ -3077,7 +3169,7 @@
                 <a:ea typeface="微软雅黑" pitchFamily="34" charset="-122"/>
                 <a:cs typeface="微软雅黑" pitchFamily="34" charset="-120"/>
               </a:rPr>
-              <a:t>钩子兑现</a:t>
+              <a:t>本节小结</a:t>
             </a:r>
             <a:endParaRPr lang="en-US" sz="1400" dirty="0"/>
           </a:p>
@@ -3116,7 +3208,7 @@
                 <a:ea typeface="微软雅黑" pitchFamily="34" charset="-122"/>
                 <a:cs typeface="微软雅黑" pitchFamily="34" charset="-120"/>
               </a:rPr>
-              <a:t>scanf吃回车的救法</a:t>
+              <a:t>今天就三件事</a:t>
             </a:r>
             <a:endParaRPr lang="en-US" sz="2800" dirty="0"/>
           </a:p>
@@ -3124,28 +3216,59 @@
       </p:sp>
       <p:sp>
         <p:nvSpPr>
-          <p:cNvPr id="5" name="Shape 3"/>
-          <p:cNvSpPr/>
-          <p:nvPr/>
-        </p:nvSpPr>
-        <p:spPr>
-          <a:xfrm>
-            <a:off x="822960" y="2395728"/>
-            <a:ext cx="10545775" cy="1746504"/>
-          </a:xfrm>
-          <a:prstGeom prst="rect">
-            <a:avLst/>
-          </a:prstGeom>
-          <a:solidFill>
-            <a:srgbClr val="F5F6F7"/>
-          </a:solidFill>
-          <a:ln w="9525">
-            <a:solidFill>
-              <a:srgbClr val="D8DBE0"/>
-            </a:solidFill>
-            <a:prstDash val="solid"/>
-          </a:ln>
-        </p:spPr>
+          <p:cNvPr id="5" name="Text 3"/>
+          <p:cNvSpPr/>
+          <p:nvPr/>
+        </p:nvSpPr>
+        <p:spPr>
+          <a:xfrm>
+            <a:off x="896112" y="2395728"/>
+            <a:ext cx="10454335" cy="397764"/>
+          </a:xfrm>
+          <a:prstGeom prst="rect">
+            <a:avLst/>
+          </a:prstGeom>
+          <a:noFill/>
+          <a:ln/>
+        </p:spPr>
+        <p:txBody>
+          <a:bodyPr wrap="square" rtlCol="0" anchor="t"/>
+          <a:lstStyle/>
+          <a:p>
+            <a:pPr algn="l" indent="0" marL="0">
+              <a:lnSpc>
+                <a:spcPct val="115000"/>
+              </a:lnSpc>
+              <a:buNone/>
+            </a:pPr>
+            <a:r>
+              <a:rPr lang="en-US" sz="1800" b="1" dirty="0">
+                <a:solidFill>
+                  <a:srgbClr val="1F4E9C"/>
+                </a:solidFill>
+                <a:latin typeface="微软雅黑" pitchFamily="34" charset="0"/>
+                <a:ea typeface="微软雅黑" pitchFamily="34" charset="-122"/>
+                <a:cs typeface="微软雅黑" pitchFamily="34" charset="-120"/>
+              </a:rPr>
+              <a:t>•  </a:t>
+            </a:r>
+            <a:pPr algn="l" indent="0" marL="0">
+              <a:lnSpc>
+                <a:spcPct val="115000"/>
+              </a:lnSpc>
+              <a:buNone/>
+            </a:pPr>
+            <a:r>
+              <a:rPr lang="en-US" sz="1800" dirty="0">
+                <a:solidFill>
+                  <a:srgbClr val="000000"/>
+                </a:solidFill>
+              </a:rPr>
+              <a:t>指针加1按指向类型挪格子；p+n就是往前n格</a:t>
+            </a:r>
+            <a:endParaRPr lang="en-US" sz="1800" dirty="0"/>
+          </a:p>
+        </p:txBody>
       </p:sp>
       <p:sp>
         <p:nvSpPr>
@@ -3155,8 +3278,8 @@
         </p:nvSpPr>
         <p:spPr>
           <a:xfrm>
-            <a:off x="1078992" y="2505456"/>
-            <a:ext cx="10033711" cy="1527048"/>
+            <a:off x="896112" y="2866644"/>
+            <a:ext cx="10454335" cy="397764"/>
           </a:xfrm>
           <a:prstGeom prst="rect">
             <a:avLst/>
@@ -3170,27 +3293,36 @@
           <a:p>
             <a:pPr algn="l" indent="0" marL="0">
               <a:lnSpc>
-                <a:spcPct val="125000"/>
-              </a:lnSpc>
-              <a:buNone/>
-            </a:pPr>
-            <a:r>
-              <a:rPr lang="en-US" sz="1400" dirty="0">
-                <a:solidFill>
-                  <a:srgbClr val="1F2329"/>
-                </a:solidFill>
-                <a:latin typeface="Consolas" pitchFamily="34" charset="0"/>
-                <a:ea typeface="Consolas" pitchFamily="34" charset="-122"/>
-                <a:cs typeface="Consolas" pitchFamily="34" charset="-120"/>
-              </a:rPr>
-              <a:t>int n;
-char ch;
-scanf("%d", &amp;n);
-ch = getchar();       // 收走敲数字留下的回车
-scanf("%c", &amp;ch);     // 或者写成 scanf(" %c", &amp;ch);
-</a:t>
-            </a:r>
-            <a:endParaRPr lang="en-US" sz="1400" dirty="0"/>
+                <a:spcPct val="115000"/>
+              </a:lnSpc>
+              <a:buNone/>
+            </a:pPr>
+            <a:r>
+              <a:rPr lang="en-US" sz="1800" b="1" dirty="0">
+                <a:solidFill>
+                  <a:srgbClr val="1F4E9C"/>
+                </a:solidFill>
+                <a:latin typeface="微软雅黑" pitchFamily="34" charset="0"/>
+                <a:ea typeface="微软雅黑" pitchFamily="34" charset="-122"/>
+                <a:cs typeface="微软雅黑" pitchFamily="34" charset="-120"/>
+              </a:rPr>
+              <a:t>•  </a:t>
+            </a:r>
+            <a:pPr algn="l" indent="0" marL="0">
+              <a:lnSpc>
+                <a:spcPct val="115000"/>
+              </a:lnSpc>
+              <a:buNone/>
+            </a:pPr>
+            <a:r>
+              <a:rPr lang="en-US" sz="1800" dirty="0">
+                <a:solidFill>
+                  <a:srgbClr val="000000"/>
+                </a:solidFill>
+              </a:rPr>
+              <a:t>a[i]就是*(a+i)：下标是偏移量，0表示起点自己</a:t>
+            </a:r>
+            <a:endParaRPr lang="en-US" sz="1800" dirty="0"/>
           </a:p>
         </p:txBody>
       </p:sp>
@@ -3202,7 +3334,7 @@
         </p:nvSpPr>
         <p:spPr>
           <a:xfrm>
-            <a:off x="896112" y="4343400"/>
+            <a:off x="896112" y="3337560"/>
             <a:ext cx="10454335" cy="397764"/>
           </a:xfrm>
           <a:prstGeom prst="rect">
@@ -3244,7 +3376,7 @@
                   <a:srgbClr val="000000"/>
                 </a:solidFill>
               </a:rPr>
-              <a:t>敲完数字的回车留在缓冲区，被%c收走，看起来像这行被跳过</a:t>
+              <a:t>越界是踩进别人的内存，多半不报错；最大下标是n-1</a:t>
             </a:r>
             <a:endParaRPr lang="en-US" sz="1800" dirty="0"/>
           </a:p>
@@ -3258,8 +3390,8 @@
         </p:nvSpPr>
         <p:spPr>
           <a:xfrm>
-            <a:off x="896112" y="4814316"/>
-            <a:ext cx="10454335" cy="397764"/>
+            <a:off x="822960" y="3899916"/>
+            <a:ext cx="10545775" cy="358902"/>
           </a:xfrm>
           <a:prstGeom prst="rect">
             <a:avLst/>
@@ -3272,93 +3404,20 @@
           <a:lstStyle/>
           <a:p>
             <a:pPr algn="l" indent="0" marL="0">
-              <a:lnSpc>
-                <a:spcPct val="115000"/>
-              </a:lnSpc>
-              <a:buNone/>
-            </a:pPr>
-            <a:r>
-              <a:rPr lang="en-US" sz="1800" b="1" dirty="0">
-                <a:solidFill>
-                  <a:srgbClr val="1F4E9C"/>
-                </a:solidFill>
-                <a:latin typeface="微软雅黑" pitchFamily="34" charset="0"/>
-                <a:ea typeface="微软雅黑" pitchFamily="34" charset="-122"/>
-                <a:cs typeface="微软雅黑" pitchFamily="34" charset="-120"/>
-              </a:rPr>
-              <a:t>•  </a:t>
-            </a:r>
-            <a:pPr algn="l" indent="0" marL="0">
-              <a:lnSpc>
-                <a:spcPct val="115000"/>
-              </a:lnSpc>
-              <a:buNone/>
-            </a:pPr>
-            <a:r>
-              <a:rPr lang="en-US" sz="1800" dirty="0">
-                <a:solidFill>
-                  <a:srgbClr val="000000"/>
-                </a:solidFill>
-              </a:rPr>
-              <a:t>两种救法记一种：getchar()收走，或者%c前加空格挡掉空白</a:t>
-            </a:r>
-            <a:endParaRPr lang="en-US" sz="1800" dirty="0"/>
-          </a:p>
-        </p:txBody>
-      </p:sp>
-      <p:sp>
-        <p:nvSpPr>
-          <p:cNvPr id="9" name="Text 7"/>
-          <p:cNvSpPr/>
-          <p:nvPr/>
-        </p:nvSpPr>
-        <p:spPr>
-          <a:xfrm>
-            <a:off x="896112" y="5285232"/>
-            <a:ext cx="10454335" cy="397764"/>
-          </a:xfrm>
-          <a:prstGeom prst="rect">
-            <a:avLst/>
-          </a:prstGeom>
-          <a:noFill/>
-          <a:ln/>
-        </p:spPr>
-        <p:txBody>
-          <a:bodyPr wrap="square" rtlCol="0" anchor="t"/>
-          <a:lstStyle/>
-          <a:p>
-            <a:pPr algn="l" indent="0" marL="0">
-              <a:lnSpc>
-                <a:spcPct val="115000"/>
-              </a:lnSpc>
-              <a:buNone/>
-            </a:pPr>
-            <a:r>
-              <a:rPr lang="en-US" sz="1800" b="1" dirty="0">
-                <a:solidFill>
-                  <a:srgbClr val="1F4E9C"/>
-                </a:solidFill>
-                <a:latin typeface="微软雅黑" pitchFamily="34" charset="0"/>
-                <a:ea typeface="微软雅黑" pitchFamily="34" charset="-122"/>
-                <a:cs typeface="微软雅黑" pitchFamily="34" charset="-120"/>
-              </a:rPr>
-              <a:t>•  </a:t>
-            </a:r>
-            <a:pPr algn="l" indent="0" marL="0">
-              <a:lnSpc>
-                <a:spcPct val="115000"/>
-              </a:lnSpc>
-              <a:buNone/>
-            </a:pPr>
-            <a:r>
-              <a:rPr lang="en-US" sz="1800" dirty="0">
-                <a:solidFill>
-                  <a:srgbClr val="000000"/>
-                </a:solidFill>
-              </a:rPr>
-              <a:t>这个坑基础阶段留到了今天，现在填完</a:t>
-            </a:r>
-            <a:endParaRPr lang="en-US" sz="1800" dirty="0"/>
+              <a:buNone/>
+            </a:pPr>
+            <a:r>
+              <a:rPr lang="en-US" sz="1500" dirty="0">
+                <a:solidFill>
+                  <a:srgbClr val="8A9099"/>
+                </a:solidFill>
+                <a:latin typeface="微软雅黑" pitchFamily="34" charset="0"/>
+                <a:ea typeface="微软雅黑" pitchFamily="34" charset="-122"/>
+                <a:cs typeface="微软雅黑" pitchFamily="34" charset="-120"/>
+              </a:rPr>
+              <a:t>下一节：结构体与typedef，数据结构的结点就是用它们定义的</a:t>
+            </a:r>
+            <a:endParaRPr lang="en-US" sz="1500" dirty="0"/>
           </a:p>
         </p:txBody>
       </p:sp>
@@ -3434,7 +3493,7 @@
                 <a:ea typeface="微软雅黑" pitchFamily="34" charset="-122"/>
                 <a:cs typeface="微软雅黑" pitchFamily="34" charset="-120"/>
               </a:rPr>
-              <a:t>13 / 14</a:t>
+              <a:t>13 / 15</a:t>
             </a:r>
             <a:endParaRPr lang="en-US" sz="1000" dirty="0"/>
           </a:p>
@@ -3473,7 +3532,7 @@
                 <a:ea typeface="微软雅黑" pitchFamily="34" charset="-122"/>
                 <a:cs typeface="微软雅黑" pitchFamily="34" charset="-120"/>
               </a:rPr>
-              <a:t>本节小结</a:t>
+              <a:t>课后任务</a:t>
             </a:r>
             <a:endParaRPr lang="en-US" sz="1400" dirty="0"/>
           </a:p>
@@ -3512,7 +3571,7 @@
                 <a:ea typeface="微软雅黑" pitchFamily="34" charset="-122"/>
                 <a:cs typeface="微软雅黑" pitchFamily="34" charset="-120"/>
               </a:rPr>
-              <a:t>今天就三件事</a:t>
+              <a:t>1道跟练 ＋ 1道模仿</a:t>
             </a:r>
             <a:endParaRPr lang="en-US" sz="2800" dirty="0"/>
           </a:p>
@@ -3527,6 +3586,76 @@
         <p:spPr>
           <a:xfrm>
             <a:off x="896112" y="2395728"/>
+            <a:ext cx="10454335" cy="740664"/>
+          </a:xfrm>
+          <a:prstGeom prst="rect">
+            <a:avLst/>
+          </a:prstGeom>
+          <a:noFill/>
+          <a:ln/>
+        </p:spPr>
+        <p:txBody>
+          <a:bodyPr wrap="square" rtlCol="0" anchor="t"/>
+          <a:lstStyle/>
+          <a:p>
+            <a:pPr algn="l" indent="0" marL="0">
+              <a:lnSpc>
+                <a:spcPct val="115000"/>
+              </a:lnSpc>
+              <a:buNone/>
+            </a:pPr>
+            <a:r>
+              <a:rPr lang="en-US" sz="1800" b="1" dirty="0">
+                <a:solidFill>
+                  <a:srgbClr val="1F4E9C"/>
+                </a:solidFill>
+                <a:latin typeface="微软雅黑" pitchFamily="34" charset="0"/>
+                <a:ea typeface="微软雅黑" pitchFamily="34" charset="-122"/>
+                <a:cs typeface="微软雅黑" pitchFamily="34" charset="-120"/>
+              </a:rPr>
+              <a:t>•  </a:t>
+            </a:r>
+            <a:pPr algn="l" indent="0" marL="0">
+              <a:lnSpc>
+                <a:spcPct val="115000"/>
+              </a:lnSpc>
+              <a:buNone/>
+            </a:pPr>
+            <a:r>
+              <a:rPr lang="en-US" sz="1800" b="1" dirty="0">
+                <a:solidFill>
+                  <a:srgbClr val="000000"/>
+                </a:solidFill>
+              </a:rPr>
+              <a:t>跟练题</a:t>
+            </a:r>
+            <a:pPr algn="l" indent="0" marL="0">
+              <a:lnSpc>
+                <a:spcPct val="115000"/>
+              </a:lnSpc>
+              <a:buNone/>
+            </a:pPr>
+            <a:r>
+              <a:rPr lang="en-US" sz="1800" dirty="0">
+                <a:solidFill>
+                  <a:srgbClr val="000000"/>
+                </a:solidFill>
+              </a:rPr>
+              <a:t>：声明int a[5]={10,20,30,40,50}，只用指针p从a走到a+4依次打印，画出每一轮p的位置</a:t>
+            </a:r>
+            <a:endParaRPr lang="en-US" sz="1800" dirty="0"/>
+          </a:p>
+        </p:txBody>
+      </p:sp>
+      <p:sp>
+        <p:nvSpPr>
+          <p:cNvPr id="6" name="Text 4"/>
+          <p:cNvSpPr/>
+          <p:nvPr/>
+        </p:nvSpPr>
+        <p:spPr>
+          <a:xfrm>
+            <a:off x="896112" y="3209544"/>
             <a:ext cx="10454335" cy="397764"/>
           </a:xfrm>
           <a:prstGeom prst="rect">
@@ -3563,12 +3692,26 @@
               <a:buNone/>
             </a:pPr>
             <a:r>
+              <a:rPr lang="en-US" sz="1800" b="1" dirty="0">
+                <a:solidFill>
+                  <a:srgbClr val="000000"/>
+                </a:solidFill>
+              </a:rPr>
+              <a:t>模仿题</a:t>
+            </a:r>
+            <a:pPr algn="l" indent="0" marL="0">
+              <a:lnSpc>
+                <a:spcPct val="115000"/>
+              </a:lnSpc>
+              <a:buNone/>
+            </a:pPr>
+            <a:r>
               <a:rPr lang="en-US" sz="1800" dirty="0">
                 <a:solidFill>
                   <a:srgbClr val="000000"/>
                 </a:solidFill>
               </a:rPr>
-              <a:t>指针加1按指向类型挪格子；p+n就是往前n格</a:t>
+              <a:t>：同一个数组，让p从a+4出发，用p--倒着走，把五个数倒序打印</a:t>
             </a:r>
             <a:endParaRPr lang="en-US" sz="1800" dirty="0"/>
           </a:p>
@@ -3576,14 +3719,14 @@
       </p:sp>
       <p:sp>
         <p:nvSpPr>
-          <p:cNvPr id="6" name="Text 4"/>
-          <p:cNvSpPr/>
-          <p:nvPr/>
-        </p:nvSpPr>
-        <p:spPr>
-          <a:xfrm>
-            <a:off x="896112" y="2866644"/>
-            <a:ext cx="10454335" cy="397764"/>
+          <p:cNvPr id="7" name="Text 5"/>
+          <p:cNvSpPr/>
+          <p:nvPr/>
+        </p:nvSpPr>
+        <p:spPr>
+          <a:xfrm>
+            <a:off x="896112" y="3680460"/>
+            <a:ext cx="10454335" cy="740664"/>
           </a:xfrm>
           <a:prstGeom prst="rect">
             <a:avLst/>
@@ -3624,7 +3767,7 @@
                   <a:srgbClr val="000000"/>
                 </a:solidFill>
               </a:rPr>
-              <a:t>a[i]就是*(a+i)：下标是偏移量，0表示起点自己</a:t>
+              <a:t>要求：先在纸上预测打印结果，再上机验证；合上资料能默写 *(a+i) 和 p &lt;= a+4</a:t>
             </a:r>
             <a:endParaRPr lang="en-US" sz="1800" dirty="0"/>
           </a:p>
@@ -3632,14 +3775,14 @@
       </p:sp>
       <p:sp>
         <p:nvSpPr>
-          <p:cNvPr id="7" name="Text 5"/>
-          <p:cNvSpPr/>
-          <p:nvPr/>
-        </p:nvSpPr>
-        <p:spPr>
-          <a:xfrm>
-            <a:off x="896112" y="3337560"/>
-            <a:ext cx="10454335" cy="397764"/>
+          <p:cNvPr id="8" name="Text 6"/>
+          <p:cNvSpPr/>
+          <p:nvPr/>
+        </p:nvSpPr>
+        <p:spPr>
+          <a:xfrm>
+            <a:off x="822960" y="4585716"/>
+            <a:ext cx="10545775" cy="358902"/>
           </a:xfrm>
           <a:prstGeom prst="rect">
             <a:avLst/>
@@ -3652,62 +3795,6 @@
           <a:lstStyle/>
           <a:p>
             <a:pPr algn="l" indent="0" marL="0">
-              <a:lnSpc>
-                <a:spcPct val="115000"/>
-              </a:lnSpc>
-              <a:buNone/>
-            </a:pPr>
-            <a:r>
-              <a:rPr lang="en-US" sz="1800" b="1" dirty="0">
-                <a:solidFill>
-                  <a:srgbClr val="1F4E9C"/>
-                </a:solidFill>
-                <a:latin typeface="微软雅黑" pitchFamily="34" charset="0"/>
-                <a:ea typeface="微软雅黑" pitchFamily="34" charset="-122"/>
-                <a:cs typeface="微软雅黑" pitchFamily="34" charset="-120"/>
-              </a:rPr>
-              <a:t>•  </a:t>
-            </a:r>
-            <a:pPr algn="l" indent="0" marL="0">
-              <a:lnSpc>
-                <a:spcPct val="115000"/>
-              </a:lnSpc>
-              <a:buNone/>
-            </a:pPr>
-            <a:r>
-              <a:rPr lang="en-US" sz="1800" dirty="0">
-                <a:solidFill>
-                  <a:srgbClr val="000000"/>
-                </a:solidFill>
-              </a:rPr>
-              <a:t>越界是踩进别人的内存，多半不报错；最大下标是n-1</a:t>
-            </a:r>
-            <a:endParaRPr lang="en-US" sz="1800" dirty="0"/>
-          </a:p>
-        </p:txBody>
-      </p:sp>
-      <p:sp>
-        <p:nvSpPr>
-          <p:cNvPr id="8" name="Text 6"/>
-          <p:cNvSpPr/>
-          <p:nvPr/>
-        </p:nvSpPr>
-        <p:spPr>
-          <a:xfrm>
-            <a:off x="822960" y="3899916"/>
-            <a:ext cx="10545775" cy="358902"/>
-          </a:xfrm>
-          <a:prstGeom prst="rect">
-            <a:avLst/>
-          </a:prstGeom>
-          <a:noFill/>
-          <a:ln/>
-        </p:spPr>
-        <p:txBody>
-          <a:bodyPr wrap="square" rtlCol="0" anchor="t"/>
-          <a:lstStyle/>
-          <a:p>
-            <a:pPr algn="l" indent="0" marL="0">
               <a:buNone/>
             </a:pPr>
             <a:r>
@@ -3719,7 +3806,7 @@
                 <a:ea typeface="微软雅黑" pitchFamily="34" charset="-122"/>
                 <a:cs typeface="微软雅黑" pitchFamily="34" charset="-120"/>
               </a:rPr>
-              <a:t>下一节：结构体与typedef，数据结构的结点就是用它们定义的</a:t>
+              <a:t>参考答案在本PPT最后两页，课后自行对照</a:t>
             </a:r>
             <a:endParaRPr lang="en-US" sz="1500" dirty="0"/>
           </a:p>
@@ -3797,7 +3884,7 @@
                 <a:ea typeface="微软雅黑" pitchFamily="34" charset="-122"/>
                 <a:cs typeface="微软雅黑" pitchFamily="34" charset="-120"/>
               </a:rPr>
-              <a:t>14 / 14</a:t>
+              <a:t>14 / 15</a:t>
             </a:r>
             <a:endParaRPr lang="en-US" sz="1000" dirty="0"/>
           </a:p>
@@ -3836,7 +3923,7 @@
                 <a:ea typeface="微软雅黑" pitchFamily="34" charset="-122"/>
                 <a:cs typeface="微软雅黑" pitchFamily="34" charset="-120"/>
               </a:rPr>
-              <a:t>课后任务</a:t>
+              <a:t>参考答案 · 跟练题</a:t>
             </a:r>
             <a:endParaRPr lang="en-US" sz="1400" dirty="0"/>
           </a:p>
@@ -3875,7 +3962,7 @@
                 <a:ea typeface="微软雅黑" pitchFamily="34" charset="-122"/>
                 <a:cs typeface="微软雅黑" pitchFamily="34" charset="-120"/>
               </a:rPr>
-              <a:t>1道跟练 ＋ 1道模仿</a:t>
+              <a:t>跟练题参考答案（自行对照）</a:t>
             </a:r>
             <a:endParaRPr lang="en-US" sz="2800" dirty="0"/>
           </a:p>
@@ -3883,13 +3970,101 @@
       </p:sp>
       <p:sp>
         <p:nvSpPr>
-          <p:cNvPr id="5" name="Text 3"/>
-          <p:cNvSpPr/>
-          <p:nvPr/>
-        </p:nvSpPr>
-        <p:spPr>
-          <a:xfrm>
-            <a:off x="896112" y="2395728"/>
+          <p:cNvPr id="5" name="Shape 3"/>
+          <p:cNvSpPr/>
+          <p:nvPr/>
+        </p:nvSpPr>
+        <p:spPr>
+          <a:xfrm>
+            <a:off x="822960" y="2395728"/>
+            <a:ext cx="10545775" cy="1984248"/>
+          </a:xfrm>
+          <a:prstGeom prst="rect">
+            <a:avLst/>
+          </a:prstGeom>
+          <a:solidFill>
+            <a:srgbClr val="F7F9FC"/>
+          </a:solidFill>
+          <a:ln/>
+        </p:spPr>
+      </p:sp>
+      <p:sp>
+        <p:nvSpPr>
+          <p:cNvPr id="6" name="Shape 4"/>
+          <p:cNvSpPr/>
+          <p:nvPr/>
+        </p:nvSpPr>
+        <p:spPr>
+          <a:xfrm>
+            <a:off x="822960" y="2395728"/>
+            <a:ext cx="50292" cy="1984248"/>
+          </a:xfrm>
+          <a:prstGeom prst="rect">
+            <a:avLst/>
+          </a:prstGeom>
+          <a:solidFill>
+            <a:srgbClr val="1F4E9C"/>
+          </a:solidFill>
+          <a:ln/>
+        </p:spPr>
+      </p:sp>
+      <p:sp>
+        <p:nvSpPr>
+          <p:cNvPr id="7" name="Text 5"/>
+          <p:cNvSpPr/>
+          <p:nvPr/>
+        </p:nvSpPr>
+        <p:spPr>
+          <a:xfrm>
+            <a:off x="1078992" y="2505456"/>
+            <a:ext cx="10033711" cy="1764792"/>
+          </a:xfrm>
+          <a:prstGeom prst="rect">
+            <a:avLst/>
+          </a:prstGeom>
+          <a:noFill/>
+          <a:ln/>
+        </p:spPr>
+        <p:txBody>
+          <a:bodyPr wrap="square" rtlCol="0" anchor="t"/>
+          <a:lstStyle/>
+          <a:p>
+            <a:pPr algn="l" indent="0" marL="0">
+              <a:lnSpc>
+                <a:spcPct val="125000"/>
+              </a:lnSpc>
+              <a:buNone/>
+            </a:pPr>
+            <a:r>
+              <a:rPr lang="en-US" sz="1400" dirty="0">
+                <a:solidFill>
+                  <a:srgbClr val="1F2329"/>
+                </a:solidFill>
+                <a:latin typeface="Consolas" pitchFamily="34" charset="0"/>
+                <a:ea typeface="Consolas" pitchFamily="34" charset="-122"/>
+                <a:cs typeface="Consolas" pitchFamily="34" charset="-120"/>
+              </a:rPr>
+              <a:t>// 指针正向遍历（a[5]={10,20,30,40,50}）
+int *p = a;
+while(p &lt;= a + 4){
+    printf("%d ", *p);
+    p++;
+}
+</a:t>
+            </a:r>
+            <a:endParaRPr lang="en-US" sz="1400" dirty="0"/>
+          </a:p>
+        </p:txBody>
+      </p:sp>
+      <p:sp>
+        <p:nvSpPr>
+          <p:cNvPr id="8" name="Text 6"/>
+          <p:cNvSpPr/>
+          <p:nvPr/>
+        </p:nvSpPr>
+        <p:spPr>
+          <a:xfrm>
+            <a:off x="896112" y="4581144"/>
             <a:ext cx="10454335" cy="740664"/>
           </a:xfrm>
           <a:prstGeom prst="rect">
@@ -3926,12 +4101,354 @@
               <a:buNone/>
             </a:pPr>
             <a:r>
+              <a:rPr lang="en-US" sz="1800" dirty="0">
+                <a:solidFill>
+                  <a:srgbClr val="000000"/>
+                </a:solidFill>
+              </a:rPr>
+              <a:t>输出10 20 30 40 50；p从a出发，每轮打印*p后p++，走到a+4为止，共五轮</a:t>
+            </a:r>
+            <a:endParaRPr lang="en-US" sz="1800" dirty="0"/>
+          </a:p>
+        </p:txBody>
+      </p:sp>
+      <p:sp>
+        <p:nvSpPr>
+          <p:cNvPr id="9" name="Text 7"/>
+          <p:cNvSpPr/>
+          <p:nvPr/>
+        </p:nvSpPr>
+        <p:spPr>
+          <a:xfrm>
+            <a:off x="896112" y="5394960"/>
+            <a:ext cx="10454335" cy="397764"/>
+          </a:xfrm>
+          <a:prstGeom prst="rect">
+            <a:avLst/>
+          </a:prstGeom>
+          <a:noFill/>
+          <a:ln/>
+        </p:spPr>
+        <p:txBody>
+          <a:bodyPr wrap="square" rtlCol="0" anchor="t"/>
+          <a:lstStyle/>
+          <a:p>
+            <a:pPr algn="l" indent="0" marL="0">
+              <a:lnSpc>
+                <a:spcPct val="115000"/>
+              </a:lnSpc>
+              <a:buNone/>
+            </a:pPr>
+            <a:r>
               <a:rPr lang="en-US" sz="1800" b="1" dirty="0">
                 <a:solidFill>
+                  <a:srgbClr val="1F4E9C"/>
+                </a:solidFill>
+                <a:latin typeface="微软雅黑" pitchFamily="34" charset="0"/>
+                <a:ea typeface="微软雅黑" pitchFamily="34" charset="-122"/>
+                <a:cs typeface="微软雅黑" pitchFamily="34" charset="-120"/>
+              </a:rPr>
+              <a:t>•  </a:t>
+            </a:r>
+            <a:pPr algn="l" indent="0" marL="0">
+              <a:lnSpc>
+                <a:spcPct val="115000"/>
+              </a:lnSpc>
+              <a:buNone/>
+            </a:pPr>
+            <a:r>
+              <a:rPr lang="en-US" sz="1800" dirty="0">
+                <a:solidFill>
                   <a:srgbClr val="000000"/>
                 </a:solidFill>
               </a:rPr>
-              <a:t>跟练题</a:t>
+              <a:t>两个坑：条件写p&lt;=a+5多走一格；先p++再打印会跳过第一个数</a:t>
+            </a:r>
+            <a:endParaRPr lang="en-US" sz="1800" dirty="0"/>
+          </a:p>
+        </p:txBody>
+      </p:sp>
+    </p:spTree>
+  </p:cSld>
+  <p:clrMapOvr>
+    <a:masterClrMapping/>
+  </p:clrMapOvr>
+</p:sld>
+</file>
+
+<file path=ppt/slides/slide15.xml><?xml version="1.0" encoding="utf-8"?>
+<p:sld xmlns:a="http://schemas.openxmlformats.org/drawingml/2006/main" xmlns:r="http://schemas.openxmlformats.org/officeDocument/2006/relationships" xmlns:p="http://schemas.openxmlformats.org/presentationml/2006/main">
+  <p:cSld name="Slide 15">
+    <p:bg>
+      <p:bgPr>
+        <a:blipFill dpi="0" rotWithShape="1">
+          <a:blip r:embed="rId1">
+            <a:lum/>
+          </a:blip>
+          <a:srcRect/>
+          <a:stretch>
+            <a:fillRect/>
+          </a:stretch>
+        </a:blipFill>
+        <a:effectLst/>
+      </p:bgPr>
+    </p:bg>
+    <p:spTree>
+      <p:nvGrpSpPr>
+        <p:cNvPr id="1" name=""/>
+        <p:cNvGrpSpPr/>
+        <p:nvPr/>
+      </p:nvGrpSpPr>
+      <p:grpSpPr>
+        <a:xfrm>
+          <a:off x="0" y="0"/>
+          <a:ext cx="0" cy="0"/>
+          <a:chOff x="0" y="0"/>
+          <a:chExt cx="0" cy="0"/>
+        </a:xfrm>
+      </p:grpSpPr>
+      <p:sp>
+        <p:nvSpPr>
+          <p:cNvPr id="2" name="Text 0"/>
+          <p:cNvSpPr/>
+          <p:nvPr/>
+        </p:nvSpPr>
+        <p:spPr>
+          <a:xfrm>
+            <a:off x="10362895" y="6016752"/>
+            <a:ext cx="1463040" cy="320040"/>
+          </a:xfrm>
+          <a:prstGeom prst="rect">
+            <a:avLst/>
+          </a:prstGeom>
+          <a:noFill/>
+          <a:ln/>
+        </p:spPr>
+        <p:txBody>
+          <a:bodyPr wrap="square" rtlCol="0" anchor="ctr"/>
+          <a:lstStyle/>
+          <a:p>
+            <a:pPr algn="r" indent="0" marL="0">
+              <a:buNone/>
+            </a:pPr>
+            <a:r>
+              <a:rPr lang="en-US" sz="1000" dirty="0">
+                <a:solidFill>
+                  <a:srgbClr val="8A9099"/>
+                </a:solidFill>
+                <a:latin typeface="微软雅黑" pitchFamily="34" charset="0"/>
+                <a:ea typeface="微软雅黑" pitchFamily="34" charset="-122"/>
+                <a:cs typeface="微软雅黑" pitchFamily="34" charset="-120"/>
+              </a:rPr>
+              <a:t>15 / 15</a:t>
+            </a:r>
+            <a:endParaRPr lang="en-US" sz="1000" dirty="0"/>
+          </a:p>
+        </p:txBody>
+      </p:sp>
+      <p:sp>
+        <p:nvSpPr>
+          <p:cNvPr id="3" name="Text 1"/>
+          <p:cNvSpPr/>
+          <p:nvPr/>
+        </p:nvSpPr>
+        <p:spPr>
+          <a:xfrm>
+            <a:off x="822960" y="960120"/>
+            <a:ext cx="10545775" cy="365760"/>
+          </a:xfrm>
+          <a:prstGeom prst="rect">
+            <a:avLst/>
+          </a:prstGeom>
+          <a:noFill/>
+          <a:ln/>
+        </p:spPr>
+        <p:txBody>
+          <a:bodyPr wrap="square" rtlCol="0" anchor="ctr"/>
+          <a:lstStyle/>
+          <a:p>
+            <a:pPr algn="l" indent="0" marL="0">
+              <a:buNone/>
+            </a:pPr>
+            <a:r>
+              <a:rPr lang="en-US" sz="1400" b="1" dirty="0">
+                <a:solidFill>
+                  <a:srgbClr val="1F4E9C"/>
+                </a:solidFill>
+                <a:latin typeface="微软雅黑" pitchFamily="34" charset="0"/>
+                <a:ea typeface="微软雅黑" pitchFamily="34" charset="-122"/>
+                <a:cs typeface="微软雅黑" pitchFamily="34" charset="-120"/>
+              </a:rPr>
+              <a:t>参考答案 · 模仿题</a:t>
+            </a:r>
+            <a:endParaRPr lang="en-US" sz="1400" dirty="0"/>
+          </a:p>
+        </p:txBody>
+      </p:sp>
+      <p:sp>
+        <p:nvSpPr>
+          <p:cNvPr id="4" name="Text 2"/>
+          <p:cNvSpPr/>
+          <p:nvPr/>
+        </p:nvSpPr>
+        <p:spPr>
+          <a:xfrm>
+            <a:off x="822960" y="1344168"/>
+            <a:ext cx="10545775" cy="731520"/>
+          </a:xfrm>
+          <a:prstGeom prst="rect">
+            <a:avLst/>
+          </a:prstGeom>
+          <a:noFill/>
+          <a:ln/>
+        </p:spPr>
+        <p:txBody>
+          <a:bodyPr wrap="square" rtlCol="0" anchor="ctr"/>
+          <a:lstStyle/>
+          <a:p>
+            <a:pPr algn="l" indent="0" marL="0">
+              <a:buNone/>
+            </a:pPr>
+            <a:r>
+              <a:rPr lang="en-US" sz="2800" b="1" dirty="0">
+                <a:solidFill>
+                  <a:srgbClr val="1F2329"/>
+                </a:solidFill>
+                <a:latin typeface="微软雅黑" pitchFamily="34" charset="0"/>
+                <a:ea typeface="微软雅黑" pitchFamily="34" charset="-122"/>
+                <a:cs typeface="微软雅黑" pitchFamily="34" charset="-120"/>
+              </a:rPr>
+              <a:t>模仿题参考答案（自行对照）</a:t>
+            </a:r>
+            <a:endParaRPr lang="en-US" sz="2800" dirty="0"/>
+          </a:p>
+        </p:txBody>
+      </p:sp>
+      <p:sp>
+        <p:nvSpPr>
+          <p:cNvPr id="5" name="Shape 3"/>
+          <p:cNvSpPr/>
+          <p:nvPr/>
+        </p:nvSpPr>
+        <p:spPr>
+          <a:xfrm>
+            <a:off x="822960" y="2395728"/>
+            <a:ext cx="10545775" cy="1984248"/>
+          </a:xfrm>
+          <a:prstGeom prst="rect">
+            <a:avLst/>
+          </a:prstGeom>
+          <a:solidFill>
+            <a:srgbClr val="F7F9FC"/>
+          </a:solidFill>
+          <a:ln/>
+        </p:spPr>
+      </p:sp>
+      <p:sp>
+        <p:nvSpPr>
+          <p:cNvPr id="6" name="Shape 4"/>
+          <p:cNvSpPr/>
+          <p:nvPr/>
+        </p:nvSpPr>
+        <p:spPr>
+          <a:xfrm>
+            <a:off x="822960" y="2395728"/>
+            <a:ext cx="50292" cy="1984248"/>
+          </a:xfrm>
+          <a:prstGeom prst="rect">
+            <a:avLst/>
+          </a:prstGeom>
+          <a:solidFill>
+            <a:srgbClr val="1F4E9C"/>
+          </a:solidFill>
+          <a:ln/>
+        </p:spPr>
+      </p:sp>
+      <p:sp>
+        <p:nvSpPr>
+          <p:cNvPr id="7" name="Text 5"/>
+          <p:cNvSpPr/>
+          <p:nvPr/>
+        </p:nvSpPr>
+        <p:spPr>
+          <a:xfrm>
+            <a:off x="1078992" y="2505456"/>
+            <a:ext cx="10033711" cy="1764792"/>
+          </a:xfrm>
+          <a:prstGeom prst="rect">
+            <a:avLst/>
+          </a:prstGeom>
+          <a:noFill/>
+          <a:ln/>
+        </p:spPr>
+        <p:txBody>
+          <a:bodyPr wrap="square" rtlCol="0" anchor="t"/>
+          <a:lstStyle/>
+          <a:p>
+            <a:pPr algn="l" indent="0" marL="0">
+              <a:lnSpc>
+                <a:spcPct val="125000"/>
+              </a:lnSpc>
+              <a:buNone/>
+            </a:pPr>
+            <a:r>
+              <a:rPr lang="en-US" sz="1400" dirty="0">
+                <a:solidFill>
+                  <a:srgbClr val="1F2329"/>
+                </a:solidFill>
+                <a:latin typeface="Consolas" pitchFamily="34" charset="0"/>
+                <a:ea typeface="Consolas" pitchFamily="34" charset="-122"/>
+                <a:cs typeface="Consolas" pitchFamily="34" charset="-120"/>
+              </a:rPr>
+              <a:t>// 指针反向遍历
+int *p = a + 4;
+while(p &gt;= a){
+    printf("%d ", *p);
+    p--;
+}
+</a:t>
+            </a:r>
+            <a:endParaRPr lang="en-US" sz="1400" dirty="0"/>
+          </a:p>
+        </p:txBody>
+      </p:sp>
+      <p:sp>
+        <p:nvSpPr>
+          <p:cNvPr id="8" name="Text 6"/>
+          <p:cNvSpPr/>
+          <p:nvPr/>
+        </p:nvSpPr>
+        <p:spPr>
+          <a:xfrm>
+            <a:off x="896112" y="4581144"/>
+            <a:ext cx="10454335" cy="397764"/>
+          </a:xfrm>
+          <a:prstGeom prst="rect">
+            <a:avLst/>
+          </a:prstGeom>
+          <a:noFill/>
+          <a:ln/>
+        </p:spPr>
+        <p:txBody>
+          <a:bodyPr wrap="square" rtlCol="0" anchor="t"/>
+          <a:lstStyle/>
+          <a:p>
+            <a:pPr algn="l" indent="0" marL="0">
+              <a:lnSpc>
+                <a:spcPct val="115000"/>
+              </a:lnSpc>
+              <a:buNone/>
+            </a:pPr>
+            <a:r>
+              <a:rPr lang="en-US" sz="1800" b="1" dirty="0">
+                <a:solidFill>
+                  <a:srgbClr val="1F4E9C"/>
+                </a:solidFill>
+                <a:latin typeface="微软雅黑" pitchFamily="34" charset="0"/>
+                <a:ea typeface="微软雅黑" pitchFamily="34" charset="-122"/>
+                <a:cs typeface="微软雅黑" pitchFamily="34" charset="-120"/>
+              </a:rPr>
+              <a:t>•  </a:t>
             </a:r>
             <a:pPr algn="l" indent="0" marL="0">
               <a:lnSpc>
@@ -3945,7 +4462,7 @@
                   <a:srgbClr val="000000"/>
                 </a:solidFill>
               </a:rPr>
-              <a:t>：声明int a[5]={10,20,30,40,50}，只用指针p从a走到a+4依次打印，画出每一轮p的位置</a:t>
+              <a:t>输出50 40 30 20 10；起点换终点，方向反过来，每轮p--</a:t>
             </a:r>
             <a:endParaRPr lang="en-US" sz="1800" dirty="0"/>
           </a:p>
@@ -3953,13 +4470,13 @@
       </p:sp>
       <p:sp>
         <p:nvSpPr>
-          <p:cNvPr id="6" name="Text 4"/>
-          <p:cNvSpPr/>
-          <p:nvPr/>
-        </p:nvSpPr>
-        <p:spPr>
-          <a:xfrm>
-            <a:off x="896112" y="3209544"/>
+          <p:cNvPr id="9" name="Text 7"/>
+          <p:cNvSpPr/>
+          <p:nvPr/>
+        </p:nvSpPr>
+        <p:spPr>
+          <a:xfrm>
+            <a:off x="896112" y="5052060"/>
             <a:ext cx="10454335" cy="397764"/>
           </a:xfrm>
           <a:prstGeom prst="rect">
@@ -3996,123 +4513,70 @@
               <a:buNone/>
             </a:pPr>
             <a:r>
+              <a:rPr lang="en-US" sz="1800" dirty="0">
+                <a:solidFill>
+                  <a:srgbClr val="000000"/>
+                </a:solidFill>
+              </a:rPr>
+              <a:t>条件是p&gt;=a，走到首格为止，少走一格就漏数</a:t>
+            </a:r>
+            <a:endParaRPr lang="en-US" sz="1800" dirty="0"/>
+          </a:p>
+        </p:txBody>
+      </p:sp>
+      <p:sp>
+        <p:nvSpPr>
+          <p:cNvPr id="10" name="Text 8"/>
+          <p:cNvSpPr/>
+          <p:nvPr/>
+        </p:nvSpPr>
+        <p:spPr>
+          <a:xfrm>
+            <a:off x="896112" y="5522976"/>
+            <a:ext cx="10454335" cy="397764"/>
+          </a:xfrm>
+          <a:prstGeom prst="rect">
+            <a:avLst/>
+          </a:prstGeom>
+          <a:noFill/>
+          <a:ln/>
+        </p:spPr>
+        <p:txBody>
+          <a:bodyPr wrap="square" rtlCol="0" anchor="t"/>
+          <a:lstStyle/>
+          <a:p>
+            <a:pPr algn="l" indent="0" marL="0">
+              <a:lnSpc>
+                <a:spcPct val="115000"/>
+              </a:lnSpc>
+              <a:buNone/>
+            </a:pPr>
+            <a:r>
               <a:rPr lang="en-US" sz="1800" b="1" dirty="0">
                 <a:solidFill>
+                  <a:srgbClr val="1F4E9C"/>
+                </a:solidFill>
+                <a:latin typeface="微软雅黑" pitchFamily="34" charset="0"/>
+                <a:ea typeface="微软雅黑" pitchFamily="34" charset="-122"/>
+                <a:cs typeface="微软雅黑" pitchFamily="34" charset="-120"/>
+              </a:rPr>
+              <a:t>•  </a:t>
+            </a:r>
+            <a:pPr algn="l" indent="0" marL="0">
+              <a:lnSpc>
+                <a:spcPct val="115000"/>
+              </a:lnSpc>
+              <a:buNone/>
+            </a:pPr>
+            <a:r>
+              <a:rPr lang="en-US" sz="1800" dirty="0">
+                <a:solidFill>
                   <a:srgbClr val="000000"/>
                 </a:solidFill>
               </a:rPr>
-              <a:t>模仿题</a:t>
-            </a:r>
-            <a:pPr algn="l" indent="0" marL="0">
-              <a:lnSpc>
-                <a:spcPct val="115000"/>
-              </a:lnSpc>
-              <a:buNone/>
-            </a:pPr>
-            <a:r>
-              <a:rPr lang="en-US" sz="1800" dirty="0">
-                <a:solidFill>
-                  <a:srgbClr val="000000"/>
-                </a:solidFill>
-              </a:rPr>
-              <a:t>：同一个数组，让p从a+4出发，用p--倒着走，把五个数倒序打印</a:t>
+              <a:t>代码省略#include &lt;stdio.h&gt;与main骨架</a:t>
             </a:r>
             <a:endParaRPr lang="en-US" sz="1800" dirty="0"/>
-          </a:p>
-        </p:txBody>
-      </p:sp>
-      <p:sp>
-        <p:nvSpPr>
-          <p:cNvPr id="7" name="Text 5"/>
-          <p:cNvSpPr/>
-          <p:nvPr/>
-        </p:nvSpPr>
-        <p:spPr>
-          <a:xfrm>
-            <a:off x="896112" y="3680460"/>
-            <a:ext cx="10454335" cy="740664"/>
-          </a:xfrm>
-          <a:prstGeom prst="rect">
-            <a:avLst/>
-          </a:prstGeom>
-          <a:noFill/>
-          <a:ln/>
-        </p:spPr>
-        <p:txBody>
-          <a:bodyPr wrap="square" rtlCol="0" anchor="t"/>
-          <a:lstStyle/>
-          <a:p>
-            <a:pPr algn="l" indent="0" marL="0">
-              <a:lnSpc>
-                <a:spcPct val="115000"/>
-              </a:lnSpc>
-              <a:buNone/>
-            </a:pPr>
-            <a:r>
-              <a:rPr lang="en-US" sz="1800" b="1" dirty="0">
-                <a:solidFill>
-                  <a:srgbClr val="1F4E9C"/>
-                </a:solidFill>
-                <a:latin typeface="微软雅黑" pitchFamily="34" charset="0"/>
-                <a:ea typeface="微软雅黑" pitchFamily="34" charset="-122"/>
-                <a:cs typeface="微软雅黑" pitchFamily="34" charset="-120"/>
-              </a:rPr>
-              <a:t>•  </a:t>
-            </a:r>
-            <a:pPr algn="l" indent="0" marL="0">
-              <a:lnSpc>
-                <a:spcPct val="115000"/>
-              </a:lnSpc>
-              <a:buNone/>
-            </a:pPr>
-            <a:r>
-              <a:rPr lang="en-US" sz="1800" dirty="0">
-                <a:solidFill>
-                  <a:srgbClr val="000000"/>
-                </a:solidFill>
-              </a:rPr>
-              <a:t>要求：先在纸上预测打印结果，再上机验证；合上资料能默写 *(a+i) 和 p &lt;= a+4</a:t>
-            </a:r>
-            <a:endParaRPr lang="en-US" sz="1800" dirty="0"/>
-          </a:p>
-        </p:txBody>
-      </p:sp>
-      <p:sp>
-        <p:nvSpPr>
-          <p:cNvPr id="8" name="Text 6"/>
-          <p:cNvSpPr/>
-          <p:nvPr/>
-        </p:nvSpPr>
-        <p:spPr>
-          <a:xfrm>
-            <a:off x="822960" y="4585716"/>
-            <a:ext cx="10545775" cy="358902"/>
-          </a:xfrm>
-          <a:prstGeom prst="rect">
-            <a:avLst/>
-          </a:prstGeom>
-          <a:noFill/>
-          <a:ln/>
-        </p:spPr>
-        <p:txBody>
-          <a:bodyPr wrap="square" rtlCol="0" anchor="t"/>
-          <a:lstStyle/>
-          <a:p>
-            <a:pPr algn="l" indent="0" marL="0">
-              <a:buNone/>
-            </a:pPr>
-            <a:r>
-              <a:rPr lang="en-US" sz="1500" dirty="0">
-                <a:solidFill>
-                  <a:srgbClr val="8A9099"/>
-                </a:solidFill>
-                <a:latin typeface="微软雅黑" pitchFamily="34" charset="0"/>
-                <a:ea typeface="微软雅黑" pitchFamily="34" charset="-122"/>
-                <a:cs typeface="微软雅黑" pitchFamily="34" charset="-120"/>
-              </a:rPr>
-              <a:t>参考答案在讲稿附录一</a:t>
-            </a:r>
-            <a:endParaRPr lang="en-US" sz="1500" dirty="0"/>
           </a:p>
         </p:txBody>
       </p:sp>
@@ -4188,7 +4652,7 @@
                 <a:ea typeface="微软雅黑" pitchFamily="34" charset="-122"/>
                 <a:cs typeface="微软雅黑" pitchFamily="34" charset="-120"/>
               </a:rPr>
-              <a:t>2 / 14</a:t>
+              <a:t>2 / 15</a:t>
             </a:r>
             <a:endParaRPr lang="en-US" sz="1000" dirty="0"/>
           </a:p>
@@ -4512,7 +4976,7 @@
                 <a:ea typeface="微软雅黑" pitchFamily="34" charset="-122"/>
                 <a:cs typeface="微软雅黑" pitchFamily="34" charset="-120"/>
               </a:rPr>
-              <a:t>3 / 14</a:t>
+              <a:t>3 / 15</a:t>
             </a:r>
             <a:endParaRPr lang="en-US" sz="1000" dirty="0"/>
           </a:p>
@@ -4611,19 +5075,34 @@
             <a:avLst/>
           </a:prstGeom>
           <a:solidFill>
-            <a:srgbClr val="F5F6F7"/>
+            <a:srgbClr val="F7F9FC"/>
           </a:solidFill>
-          <a:ln w="9525">
-            <a:solidFill>
-              <a:srgbClr val="D8DBE0"/>
-            </a:solidFill>
-            <a:prstDash val="solid"/>
-          </a:ln>
-        </p:spPr>
-      </p:sp>
-      <p:sp>
-        <p:nvSpPr>
-          <p:cNvPr id="6" name="Text 4"/>
+          <a:ln/>
+        </p:spPr>
+      </p:sp>
+      <p:sp>
+        <p:nvSpPr>
+          <p:cNvPr id="6" name="Shape 4"/>
+          <p:cNvSpPr/>
+          <p:nvPr/>
+        </p:nvSpPr>
+        <p:spPr>
+          <a:xfrm>
+            <a:off x="822960" y="2395728"/>
+            <a:ext cx="50292" cy="1508760"/>
+          </a:xfrm>
+          <a:prstGeom prst="rect">
+            <a:avLst/>
+          </a:prstGeom>
+          <a:solidFill>
+            <a:srgbClr val="1F4E9C"/>
+          </a:solidFill>
+          <a:ln/>
+        </p:spPr>
+      </p:sp>
+      <p:sp>
+        <p:nvSpPr>
+          <p:cNvPr id="7" name="Text 5"/>
           <p:cNvSpPr/>
           <p:nvPr/>
         </p:nvSpPr>
@@ -4669,7 +5148,7 @@
       </p:sp>
       <p:sp>
         <p:nvSpPr>
-          <p:cNvPr id="7" name="Text 5"/>
+          <p:cNvPr id="8" name="Text 6"/>
           <p:cNvSpPr/>
           <p:nvPr/>
         </p:nvSpPr>
@@ -4753,7 +5232,7 @@
       </p:sp>
       <p:sp>
         <p:nvSpPr>
-          <p:cNvPr id="8" name="Text 6"/>
+          <p:cNvPr id="9" name="Text 7"/>
           <p:cNvSpPr/>
           <p:nvPr/>
         </p:nvSpPr>
@@ -4809,7 +5288,7 @@
       </p:sp>
       <p:sp>
         <p:nvSpPr>
-          <p:cNvPr id="9" name="Text 7"/>
+          <p:cNvPr id="10" name="Text 8"/>
           <p:cNvSpPr/>
           <p:nvPr/>
         </p:nvSpPr>
@@ -4935,7 +5414,7 @@
                 <a:ea typeface="微软雅黑" pitchFamily="34" charset="-122"/>
                 <a:cs typeface="微软雅黑" pitchFamily="34" charset="-120"/>
               </a:rPr>
-              <a:t>4 / 14</a:t>
+              <a:t>4 / 15</a:t>
             </a:r>
             <a:endParaRPr lang="en-US" sz="1000" dirty="0"/>
           </a:p>
@@ -5034,19 +5513,34 @@
             <a:avLst/>
           </a:prstGeom>
           <a:solidFill>
-            <a:srgbClr val="F5F6F7"/>
+            <a:srgbClr val="F7F9FC"/>
           </a:solidFill>
-          <a:ln w="9525">
-            <a:solidFill>
-              <a:srgbClr val="D8DBE0"/>
-            </a:solidFill>
-            <a:prstDash val="solid"/>
-          </a:ln>
-        </p:spPr>
-      </p:sp>
-      <p:sp>
-        <p:nvSpPr>
-          <p:cNvPr id="6" name="Text 4"/>
+          <a:ln/>
+        </p:spPr>
+      </p:sp>
+      <p:sp>
+        <p:nvSpPr>
+          <p:cNvPr id="6" name="Shape 4"/>
+          <p:cNvSpPr/>
+          <p:nvPr/>
+        </p:nvSpPr>
+        <p:spPr>
+          <a:xfrm>
+            <a:off x="822960" y="2395728"/>
+            <a:ext cx="50292" cy="1271016"/>
+          </a:xfrm>
+          <a:prstGeom prst="rect">
+            <a:avLst/>
+          </a:prstGeom>
+          <a:solidFill>
+            <a:srgbClr val="1F4E9C"/>
+          </a:solidFill>
+          <a:ln/>
+        </p:spPr>
+      </p:sp>
+      <p:sp>
+        <p:nvSpPr>
+          <p:cNvPr id="7" name="Text 5"/>
           <p:cNvSpPr/>
           <p:nvPr/>
         </p:nvSpPr>
@@ -5091,7 +5585,7 @@
       </p:sp>
       <p:sp>
         <p:nvSpPr>
-          <p:cNvPr id="7" name="Text 5"/>
+          <p:cNvPr id="8" name="Text 6"/>
           <p:cNvSpPr/>
           <p:nvPr/>
         </p:nvSpPr>
@@ -5147,7 +5641,7 @@
       </p:sp>
       <p:sp>
         <p:nvSpPr>
-          <p:cNvPr id="8" name="Text 6"/>
+          <p:cNvPr id="9" name="Text 7"/>
           <p:cNvSpPr/>
           <p:nvPr/>
         </p:nvSpPr>
@@ -5203,7 +5697,7 @@
       </p:sp>
       <p:sp>
         <p:nvSpPr>
-          <p:cNvPr id="9" name="Text 7"/>
+          <p:cNvPr id="10" name="Text 8"/>
           <p:cNvSpPr/>
           <p:nvPr/>
         </p:nvSpPr>
@@ -5329,7 +5823,7 @@
                 <a:ea typeface="微软雅黑" pitchFamily="34" charset="-122"/>
                 <a:cs typeface="微软雅黑" pitchFamily="34" charset="-120"/>
               </a:rPr>
-              <a:t>5 / 14</a:t>
+              <a:t>5 / 15</a:t>
             </a:r>
             <a:endParaRPr lang="en-US" sz="1000" dirty="0"/>
           </a:p>
@@ -5428,19 +5922,34 @@
             <a:avLst/>
           </a:prstGeom>
           <a:solidFill>
-            <a:srgbClr val="F5F6F7"/>
+            <a:srgbClr val="F7F9FC"/>
           </a:solidFill>
-          <a:ln w="9525">
-            <a:solidFill>
-              <a:srgbClr val="D8DBE0"/>
-            </a:solidFill>
-            <a:prstDash val="solid"/>
-          </a:ln>
-        </p:spPr>
-      </p:sp>
-      <p:sp>
-        <p:nvSpPr>
-          <p:cNvPr id="6" name="Text 4"/>
+          <a:ln/>
+        </p:spPr>
+      </p:sp>
+      <p:sp>
+        <p:nvSpPr>
+          <p:cNvPr id="6" name="Shape 4"/>
+          <p:cNvSpPr/>
+          <p:nvPr/>
+        </p:nvSpPr>
+        <p:spPr>
+          <a:xfrm>
+            <a:off x="822960" y="2395728"/>
+            <a:ext cx="50292" cy="1271016"/>
+          </a:xfrm>
+          <a:prstGeom prst="rect">
+            <a:avLst/>
+          </a:prstGeom>
+          <a:solidFill>
+            <a:srgbClr val="1F4E9C"/>
+          </a:solidFill>
+          <a:ln/>
+        </p:spPr>
+      </p:sp>
+      <p:sp>
+        <p:nvSpPr>
+          <p:cNvPr id="7" name="Text 5"/>
           <p:cNvSpPr/>
           <p:nvPr/>
         </p:nvSpPr>
@@ -5485,7 +5994,7 @@
       </p:sp>
       <p:sp>
         <p:nvSpPr>
-          <p:cNvPr id="7" name="Text 5"/>
+          <p:cNvPr id="8" name="Text 6"/>
           <p:cNvSpPr/>
           <p:nvPr/>
         </p:nvSpPr>
@@ -5541,7 +6050,7 @@
       </p:sp>
       <p:sp>
         <p:nvSpPr>
-          <p:cNvPr id="8" name="Text 6"/>
+          <p:cNvPr id="9" name="Text 7"/>
           <p:cNvSpPr/>
           <p:nvPr/>
         </p:nvSpPr>
@@ -5625,7 +6134,7 @@
       </p:sp>
       <p:sp>
         <p:nvSpPr>
-          <p:cNvPr id="9" name="Text 7"/>
+          <p:cNvPr id="10" name="Text 8"/>
           <p:cNvSpPr/>
           <p:nvPr/>
         </p:nvSpPr>
@@ -5751,7 +6260,7 @@
                 <a:ea typeface="微软雅黑" pitchFamily="34" charset="-122"/>
                 <a:cs typeface="微软雅黑" pitchFamily="34" charset="-120"/>
               </a:rPr>
-              <a:t>6 / 14</a:t>
+              <a:t>6 / 15</a:t>
             </a:r>
             <a:endParaRPr lang="en-US" sz="1000" dirty="0"/>
           </a:p>
@@ -6103,7 +6612,7 @@
                 <a:ea typeface="微软雅黑" pitchFamily="34" charset="-122"/>
                 <a:cs typeface="微软雅黑" pitchFamily="34" charset="-120"/>
               </a:rPr>
-              <a:t>7 / 14</a:t>
+              <a:t>7 / 15</a:t>
             </a:r>
             <a:endParaRPr lang="en-US" sz="1000" dirty="0"/>
           </a:p>
@@ -6202,19 +6711,34 @@
             <a:avLst/>
           </a:prstGeom>
           <a:solidFill>
-            <a:srgbClr val="F5F6F7"/>
+            <a:srgbClr val="F7F9FC"/>
           </a:solidFill>
-          <a:ln w="9525">
-            <a:solidFill>
-              <a:srgbClr val="D8DBE0"/>
-            </a:solidFill>
-            <a:prstDash val="solid"/>
-          </a:ln>
-        </p:spPr>
-      </p:sp>
-      <p:sp>
-        <p:nvSpPr>
-          <p:cNvPr id="6" name="Text 4"/>
+          <a:ln/>
+        </p:spPr>
+      </p:sp>
+      <p:sp>
+        <p:nvSpPr>
+          <p:cNvPr id="6" name="Shape 4"/>
+          <p:cNvSpPr/>
+          <p:nvPr/>
+        </p:nvSpPr>
+        <p:spPr>
+          <a:xfrm>
+            <a:off x="822960" y="2395728"/>
+            <a:ext cx="50292" cy="1508760"/>
+          </a:xfrm>
+          <a:prstGeom prst="rect">
+            <a:avLst/>
+          </a:prstGeom>
+          <a:solidFill>
+            <a:srgbClr val="1F4E9C"/>
+          </a:solidFill>
+          <a:ln/>
+        </p:spPr>
+      </p:sp>
+      <p:sp>
+        <p:nvSpPr>
+          <p:cNvPr id="7" name="Text 5"/>
           <p:cNvSpPr/>
           <p:nvPr/>
         </p:nvSpPr>
@@ -6260,7 +6784,7 @@
       </p:sp>
       <p:sp>
         <p:nvSpPr>
-          <p:cNvPr id="7" name="Text 5"/>
+          <p:cNvPr id="8" name="Text 6"/>
           <p:cNvSpPr/>
           <p:nvPr/>
         </p:nvSpPr>
@@ -6316,7 +6840,7 @@
       </p:sp>
       <p:sp>
         <p:nvSpPr>
-          <p:cNvPr id="8" name="Text 6"/>
+          <p:cNvPr id="9" name="Text 7"/>
           <p:cNvSpPr/>
           <p:nvPr/>
         </p:nvSpPr>
@@ -6372,7 +6896,7 @@
       </p:sp>
       <p:sp>
         <p:nvSpPr>
-          <p:cNvPr id="9" name="Text 7"/>
+          <p:cNvPr id="10" name="Text 8"/>
           <p:cNvSpPr/>
           <p:nvPr/>
         </p:nvSpPr>
@@ -6498,7 +7022,7 @@
                 <a:ea typeface="微软雅黑" pitchFamily="34" charset="-122"/>
                 <a:cs typeface="微软雅黑" pitchFamily="34" charset="-120"/>
               </a:rPr>
-              <a:t>8 / 14</a:t>
+              <a:t>8 / 15</a:t>
             </a:r>
             <a:endParaRPr lang="en-US" sz="1000" dirty="0"/>
           </a:p>
@@ -6537,7 +7061,7 @@
                 <a:ea typeface="微软雅黑" pitchFamily="34" charset="-122"/>
                 <a:cs typeface="微软雅黑" pitchFamily="34" charset="-120"/>
               </a:rPr>
-              <a:t>板书推演</a:t>
+              <a:t>两种遍历</a:t>
             </a:r>
             <a:endParaRPr lang="en-US" sz="1400" dirty="0"/>
           </a:p>
@@ -6576,7 +7100,7 @@
                 <a:ea typeface="微软雅黑" pitchFamily="34" charset="-122"/>
                 <a:cs typeface="微软雅黑" pitchFamily="34" charset="-120"/>
               </a:rPr>
-              <a:t>用指针把数组走一遍</a:t>
+              <a:t>下标法与指针法：一套逻辑，两种写法（配合讲稿用图讲指针走数组）</a:t>
             </a:r>
             <a:endParaRPr lang="en-US" sz="2800" dirty="0"/>
           </a:p>
@@ -6584,14 +7108,54 @@
       </p:sp>
       <p:sp>
         <p:nvSpPr>
-          <p:cNvPr id="5" name="Text 3"/>
-          <p:cNvSpPr/>
-          <p:nvPr/>
-        </p:nvSpPr>
-        <p:spPr>
-          <a:xfrm>
-            <a:off x="822960" y="2194560"/>
-            <a:ext cx="10545775" cy="685800"/>
+          <p:cNvPr id="5" name="Shape 3"/>
+          <p:cNvSpPr/>
+          <p:nvPr/>
+        </p:nvSpPr>
+        <p:spPr>
+          <a:xfrm>
+            <a:off x="822960" y="2395728"/>
+            <a:ext cx="10545775" cy="1508760"/>
+          </a:xfrm>
+          <a:prstGeom prst="rect">
+            <a:avLst/>
+          </a:prstGeom>
+          <a:solidFill>
+            <a:srgbClr val="F7F9FC"/>
+          </a:solidFill>
+          <a:ln/>
+        </p:spPr>
+      </p:sp>
+      <p:sp>
+        <p:nvSpPr>
+          <p:cNvPr id="6" name="Shape 4"/>
+          <p:cNvSpPr/>
+          <p:nvPr/>
+        </p:nvSpPr>
+        <p:spPr>
+          <a:xfrm>
+            <a:off x="822960" y="2395728"/>
+            <a:ext cx="50292" cy="1508760"/>
+          </a:xfrm>
+          <a:prstGeom prst="rect">
+            <a:avLst/>
+          </a:prstGeom>
+          <a:solidFill>
+            <a:srgbClr val="1F4E9C"/>
+          </a:solidFill>
+          <a:ln/>
+        </p:spPr>
+      </p:sp>
+      <p:sp>
+        <p:nvSpPr>
+          <p:cNvPr id="7" name="Text 5"/>
+          <p:cNvSpPr/>
+          <p:nvPr/>
+        </p:nvSpPr>
+        <p:spPr>
+          <a:xfrm>
+            <a:off x="1078992" y="2505456"/>
+            <a:ext cx="10033711" cy="1289304"/>
           </a:xfrm>
           <a:prstGeom prst="rect">
             <a:avLst/>
@@ -6604,84 +7168,251 @@
           <a:lstStyle/>
           <a:p>
             <a:pPr algn="l" indent="0" marL="0">
-              <a:buNone/>
-            </a:pPr>
-            <a:r>
-              <a:rPr lang="en-US" sz="1600" dirty="0">
+              <a:lnSpc>
+                <a:spcPct val="125000"/>
+              </a:lnSpc>
+              <a:buNone/>
+            </a:pPr>
+            <a:r>
+              <a:rPr lang="en-US" sz="1400" dirty="0">
                 <a:solidFill>
                   <a:srgbClr val="1F2329"/>
                 </a:solidFill>
-                <a:latin typeface="微软雅黑" pitchFamily="34" charset="0"/>
-                <a:ea typeface="微软雅黑" pitchFamily="34" charset="-122"/>
-                <a:cs typeface="微软雅黑" pitchFamily="34" charset="-120"/>
-              </a:rPr>
-              <a:t>任务：① 画a[5]的五个连续格子并填值；② 画p指向a[0]；③ 写一行指针版遍历循环，标出每一轮p的位置；④ 右侧对照写下标版。只画格子、箭头与两行循环，不写程序骨架</a:t>
-            </a:r>
-            <a:endParaRPr lang="en-US" sz="1600" dirty="0"/>
-          </a:p>
-        </p:txBody>
-      </p:sp>
-      <p:sp>
-        <p:nvSpPr>
-          <p:cNvPr id="6" name="Shape 4"/>
-          <p:cNvSpPr/>
-          <p:nvPr/>
-        </p:nvSpPr>
-        <p:spPr>
-          <a:xfrm>
-            <a:off x="822960" y="3017520"/>
-            <a:ext cx="10545775" cy="2788920"/>
-          </a:xfrm>
-          <a:prstGeom prst="rect">
-            <a:avLst/>
-          </a:prstGeom>
-          <a:solidFill>
-            <a:srgbClr val="FFFFFF"/>
-          </a:solidFill>
-          <a:ln w="12700">
-            <a:solidFill>
-              <a:srgbClr val="B9C0C9"/>
-            </a:solidFill>
-            <a:prstDash val="dash"/>
-          </a:ln>
-        </p:spPr>
-      </p:sp>
-      <p:sp>
-        <p:nvSpPr>
-          <p:cNvPr id="7" name="Text 5"/>
-          <p:cNvSpPr/>
-          <p:nvPr/>
-        </p:nvSpPr>
-        <p:spPr>
-          <a:xfrm>
-            <a:off x="822960" y="5349240"/>
-            <a:ext cx="10545775" cy="365760"/>
-          </a:xfrm>
-          <a:prstGeom prst="rect">
-            <a:avLst/>
-          </a:prstGeom>
-          <a:noFill/>
-          <a:ln/>
-        </p:spPr>
-        <p:txBody>
-          <a:bodyPr wrap="square" rtlCol="0" anchor="ctr"/>
-          <a:lstStyle/>
-          <a:p>
-            <a:pPr algn="r" indent="0" marL="0">
-              <a:buNone/>
-            </a:pPr>
-            <a:r>
-              <a:rPr lang="en-US" sz="1200" dirty="0">
-                <a:solidFill>
-                  <a:srgbClr val="8A9099"/>
-                </a:solidFill>
-                <a:latin typeface="微软雅黑" pitchFamily="34" charset="0"/>
-                <a:ea typeface="微软雅黑" pitchFamily="34" charset="-122"/>
-                <a:cs typeface="微软雅黑" pitchFamily="34" charset="-120"/>
-              </a:rPr>
-              <a:t>此处板书推演</a:t>
-            </a:r>
-            <a:endParaRPr lang="en-US" sz="1200" dirty="0"/>
+                <a:latin typeface="Consolas" pitchFamily="34" charset="0"/>
+                <a:ea typeface="Consolas" pitchFamily="34" charset="-122"/>
+                <a:cs typeface="Consolas" pitchFamily="34" charset="-120"/>
+              </a:rPr>
+              <a:t>for(i = 0; i &lt; 5; i++)
+    printf("%d", a[i]);      // 下标法
+for(p = a; p &lt;= a + 4; p++)
+    printf("%d", *p);        // 指针法
+</a:t>
+            </a:r>
+            <a:endParaRPr lang="en-US" sz="1400" dirty="0"/>
+          </a:p>
+        </p:txBody>
+      </p:sp>
+      <p:sp>
+        <p:nvSpPr>
+          <p:cNvPr id="8" name="Text 6"/>
+          <p:cNvSpPr/>
+          <p:nvPr/>
+        </p:nvSpPr>
+        <p:spPr>
+          <a:xfrm>
+            <a:off x="896112" y="4105656"/>
+            <a:ext cx="10454335" cy="397764"/>
+          </a:xfrm>
+          <a:prstGeom prst="rect">
+            <a:avLst/>
+          </a:prstGeom>
+          <a:noFill/>
+          <a:ln/>
+        </p:spPr>
+        <p:txBody>
+          <a:bodyPr wrap="square" rtlCol="0" anchor="t"/>
+          <a:lstStyle/>
+          <a:p>
+            <a:pPr algn="l" indent="0" marL="0">
+              <a:lnSpc>
+                <a:spcPct val="115000"/>
+              </a:lnSpc>
+              <a:buNone/>
+            </a:pPr>
+            <a:r>
+              <a:rPr lang="en-US" sz="1800" b="1" dirty="0">
+                <a:solidFill>
+                  <a:srgbClr val="1F4E9C"/>
+                </a:solidFill>
+                <a:latin typeface="微软雅黑" pitchFamily="34" charset="0"/>
+                <a:ea typeface="微软雅黑" pitchFamily="34" charset="-122"/>
+                <a:cs typeface="微软雅黑" pitchFamily="34" charset="-120"/>
+              </a:rPr>
+              <a:t>•  </a:t>
+            </a:r>
+            <a:pPr algn="l" indent="0" marL="0">
+              <a:lnSpc>
+                <a:spcPct val="115000"/>
+              </a:lnSpc>
+              <a:buNone/>
+            </a:pPr>
+            <a:r>
+              <a:rPr lang="en-US" sz="1800" dirty="0">
+                <a:solidFill>
+                  <a:srgbClr val="000000"/>
+                </a:solidFill>
+              </a:rPr>
+              <a:t>五个连续格子，p从a[0]出发每轮走一格：正好五轮，打印五个数（画图跟一遍）</a:t>
+            </a:r>
+            <a:endParaRPr lang="en-US" sz="1800" dirty="0"/>
+          </a:p>
+        </p:txBody>
+      </p:sp>
+      <p:sp>
+        <p:nvSpPr>
+          <p:cNvPr id="9" name="Text 7"/>
+          <p:cNvSpPr/>
+          <p:nvPr/>
+        </p:nvSpPr>
+        <p:spPr>
+          <a:xfrm>
+            <a:off x="896112" y="4576572"/>
+            <a:ext cx="10454335" cy="397764"/>
+          </a:xfrm>
+          <a:prstGeom prst="rect">
+            <a:avLst/>
+          </a:prstGeom>
+          <a:noFill/>
+          <a:ln/>
+        </p:spPr>
+        <p:txBody>
+          <a:bodyPr wrap="square" rtlCol="0" anchor="t"/>
+          <a:lstStyle/>
+          <a:p>
+            <a:pPr algn="l" indent="0" marL="0">
+              <a:lnSpc>
+                <a:spcPct val="115000"/>
+              </a:lnSpc>
+              <a:buNone/>
+            </a:pPr>
+            <a:r>
+              <a:rPr lang="en-US" sz="1800" b="1" dirty="0">
+                <a:solidFill>
+                  <a:srgbClr val="1F4E9C"/>
+                </a:solidFill>
+                <a:latin typeface="微软雅黑" pitchFamily="34" charset="0"/>
+                <a:ea typeface="微软雅黑" pitchFamily="34" charset="-122"/>
+                <a:cs typeface="微软雅黑" pitchFamily="34" charset="-120"/>
+              </a:rPr>
+              <a:t>•  </a:t>
+            </a:r>
+            <a:pPr algn="l" indent="0" marL="0">
+              <a:lnSpc>
+                <a:spcPct val="115000"/>
+              </a:lnSpc>
+              <a:buNone/>
+            </a:pPr>
+            <a:r>
+              <a:rPr lang="en-US" sz="1800" dirty="0">
+                <a:solidFill>
+                  <a:srgbClr val="000000"/>
+                </a:solidFill>
+              </a:rPr>
+              <a:t>两种写法逻辑完全等价：下标法易读，指针法贴近机器干活的方式</a:t>
+            </a:r>
+            <a:endParaRPr lang="en-US" sz="1800" dirty="0"/>
+          </a:p>
+        </p:txBody>
+      </p:sp>
+      <p:sp>
+        <p:nvSpPr>
+          <p:cNvPr id="10" name="Text 8"/>
+          <p:cNvSpPr/>
+          <p:nvPr/>
+        </p:nvSpPr>
+        <p:spPr>
+          <a:xfrm>
+            <a:off x="896112" y="5047488"/>
+            <a:ext cx="10454335" cy="397764"/>
+          </a:xfrm>
+          <a:prstGeom prst="rect">
+            <a:avLst/>
+          </a:prstGeom>
+          <a:noFill/>
+          <a:ln/>
+        </p:spPr>
+        <p:txBody>
+          <a:bodyPr wrap="square" rtlCol="0" anchor="t"/>
+          <a:lstStyle/>
+          <a:p>
+            <a:pPr algn="l" indent="0" marL="0">
+              <a:lnSpc>
+                <a:spcPct val="115000"/>
+              </a:lnSpc>
+              <a:buNone/>
+            </a:pPr>
+            <a:r>
+              <a:rPr lang="en-US" sz="1800" b="1" dirty="0">
+                <a:solidFill>
+                  <a:srgbClr val="1F4E9C"/>
+                </a:solidFill>
+                <a:latin typeface="微软雅黑" pitchFamily="34" charset="0"/>
+                <a:ea typeface="微软雅黑" pitchFamily="34" charset="-122"/>
+                <a:cs typeface="微软雅黑" pitchFamily="34" charset="-120"/>
+              </a:rPr>
+              <a:t>•  </a:t>
+            </a:r>
+            <a:pPr algn="l" indent="0" marL="0">
+              <a:lnSpc>
+                <a:spcPct val="115000"/>
+              </a:lnSpc>
+              <a:buNone/>
+            </a:pPr>
+            <a:r>
+              <a:rPr lang="en-US" sz="1800" dirty="0">
+                <a:solidFill>
+                  <a:srgbClr val="000000"/>
+                </a:solidFill>
+              </a:rPr>
+              <a:t>指针版循环的边界：p走到a+4为止，写成a+5就多走一格</a:t>
+            </a:r>
+            <a:endParaRPr lang="en-US" sz="1800" dirty="0"/>
+          </a:p>
+        </p:txBody>
+      </p:sp>
+      <p:sp>
+        <p:nvSpPr>
+          <p:cNvPr id="11" name="Text 9"/>
+          <p:cNvSpPr/>
+          <p:nvPr/>
+        </p:nvSpPr>
+        <p:spPr>
+          <a:xfrm>
+            <a:off x="896112" y="5518404"/>
+            <a:ext cx="10454335" cy="397764"/>
+          </a:xfrm>
+          <a:prstGeom prst="rect">
+            <a:avLst/>
+          </a:prstGeom>
+          <a:noFill/>
+          <a:ln/>
+        </p:spPr>
+        <p:txBody>
+          <a:bodyPr wrap="square" rtlCol="0" anchor="t"/>
+          <a:lstStyle/>
+          <a:p>
+            <a:pPr algn="l" indent="0" marL="0">
+              <a:lnSpc>
+                <a:spcPct val="115000"/>
+              </a:lnSpc>
+              <a:buNone/>
+            </a:pPr>
+            <a:r>
+              <a:rPr lang="en-US" sz="1800" b="1" dirty="0">
+                <a:solidFill>
+                  <a:srgbClr val="1F4E9C"/>
+                </a:solidFill>
+                <a:latin typeface="微软雅黑" pitchFamily="34" charset="0"/>
+                <a:ea typeface="微软雅黑" pitchFamily="34" charset="-122"/>
+                <a:cs typeface="微软雅黑" pitchFamily="34" charset="-120"/>
+              </a:rPr>
+              <a:t>•  </a:t>
+            </a:r>
+            <a:pPr algn="l" indent="0" marL="0">
+              <a:lnSpc>
+                <a:spcPct val="115000"/>
+              </a:lnSpc>
+              <a:buNone/>
+            </a:pPr>
+            <a:r>
+              <a:rPr lang="en-US" sz="1800" dirty="0">
+                <a:solidFill>
+                  <a:srgbClr val="000000"/>
+                </a:solidFill>
+              </a:rPr>
+              <a:t>阅读题的循环边界挖空常考这一类，会画图就数得出来</a:t>
+            </a:r>
+            <a:endParaRPr lang="en-US" sz="1800" dirty="0"/>
           </a:p>
         </p:txBody>
       </p:sp>
@@ -6757,7 +7488,7 @@
                 <a:ea typeface="微软雅黑" pitchFamily="34" charset="-122"/>
                 <a:cs typeface="微软雅黑" pitchFamily="34" charset="-120"/>
               </a:rPr>
-              <a:t>9 / 14</a:t>
+              <a:t>9 / 15</a:t>
             </a:r>
             <a:endParaRPr lang="en-US" sz="1000" dirty="0"/>
           </a:p>
@@ -6796,7 +7527,7 @@
                 <a:ea typeface="微软雅黑" pitchFamily="34" charset="-122"/>
                 <a:cs typeface="微软雅黑" pitchFamily="34" charset="-120"/>
               </a:rPr>
-              <a:t>两种遍历</a:t>
+              <a:t>本节难忘时刻</a:t>
             </a:r>
             <a:endParaRPr lang="en-US" sz="1400" dirty="0"/>
           </a:p>
@@ -6835,7 +7566,7 @@
                 <a:ea typeface="微软雅黑" pitchFamily="34" charset="-122"/>
                 <a:cs typeface="微软雅黑" pitchFamily="34" charset="-120"/>
               </a:rPr>
-              <a:t>下标法与指针法：一套逻辑，两种写法</a:t>
+              <a:t>越界：踩进了别人的格子</a:t>
             </a:r>
             <a:endParaRPr lang="en-US" sz="2800" dirty="0"/>
           </a:p>
@@ -6850,32 +7581,47 @@
         <p:spPr>
           <a:xfrm>
             <a:off x="822960" y="2395728"/>
-            <a:ext cx="10545775" cy="1508760"/>
+            <a:ext cx="10545775" cy="1271016"/>
           </a:xfrm>
           <a:prstGeom prst="rect">
             <a:avLst/>
           </a:prstGeom>
           <a:solidFill>
-            <a:srgbClr val="F5F6F7"/>
+            <a:srgbClr val="F7F9FC"/>
           </a:solidFill>
-          <a:ln w="9525">
-            <a:solidFill>
-              <a:srgbClr val="D8DBE0"/>
-            </a:solidFill>
-            <a:prstDash val="solid"/>
-          </a:ln>
-        </p:spPr>
-      </p:sp>
-      <p:sp>
-        <p:nvSpPr>
-          <p:cNvPr id="6" name="Text 4"/>
+          <a:ln/>
+        </p:spPr>
+      </p:sp>
+      <p:sp>
+        <p:nvSpPr>
+          <p:cNvPr id="6" name="Shape 4"/>
+          <p:cNvSpPr/>
+          <p:nvPr/>
+        </p:nvSpPr>
+        <p:spPr>
+          <a:xfrm>
+            <a:off x="822960" y="2395728"/>
+            <a:ext cx="50292" cy="1271016"/>
+          </a:xfrm>
+          <a:prstGeom prst="rect">
+            <a:avLst/>
+          </a:prstGeom>
+          <a:solidFill>
+            <a:srgbClr val="1F4E9C"/>
+          </a:solidFill>
+          <a:ln/>
+        </p:spPr>
+      </p:sp>
+      <p:sp>
+        <p:nvSpPr>
+          <p:cNvPr id="7" name="Text 5"/>
           <p:cNvSpPr/>
           <p:nvPr/>
         </p:nvSpPr>
         <p:spPr>
           <a:xfrm>
             <a:off x="1078992" y="2505456"/>
-            <a:ext cx="10033711" cy="1289304"/>
+            <a:ext cx="10033711" cy="1051560"/>
           </a:xfrm>
           <a:prstGeom prst="rect">
             <a:avLst/>
@@ -6902,10 +7648,9 @@
                 <a:ea typeface="Consolas" pitchFamily="34" charset="-122"/>
                 <a:cs typeface="Consolas" pitchFamily="34" charset="-120"/>
               </a:rPr>
-              <a:t>for(i = 0; i &lt; 5; i++)
-    printf("%d", a[i]);      // 下标法
-for(p = a; p &lt;= a + 4; p++)
-    printf("%d", *p);        // 指针法
+              <a:t>int a[5] = {10, 20, 30, 40, 50};
+int b = 100;
+a[5] = 999;           // 没有a[5]这一格：写进了别人的地盘
 </a:t>
             </a:r>
             <a:endParaRPr lang="en-US" sz="1400" dirty="0"/>
@@ -6914,13 +7659,13 @@
       </p:sp>
       <p:sp>
         <p:nvSpPr>
-          <p:cNvPr id="7" name="Text 5"/>
-          <p:cNvSpPr/>
-          <p:nvPr/>
-        </p:nvSpPr>
-        <p:spPr>
-          <a:xfrm>
-            <a:off x="896112" y="4105656"/>
+          <p:cNvPr id="8" name="Text 6"/>
+          <p:cNvSpPr/>
+          <p:nvPr/>
+        </p:nvSpPr>
+        <p:spPr>
+          <a:xfrm>
+            <a:off x="896112" y="3867912"/>
             <a:ext cx="10454335" cy="397764"/>
           </a:xfrm>
           <a:prstGeom prst="rect">
@@ -6962,7 +7707,7 @@
                   <a:srgbClr val="000000"/>
                 </a:solidFill>
               </a:rPr>
-              <a:t>两种写法逻辑完全等价：下标法易读，指针法贴近机器干活的方式</a:t>
+              <a:t>a[5]只有下标0—4这五格，a[5]是第六格——那片内存住着别的变量</a:t>
             </a:r>
             <a:endParaRPr lang="en-US" sz="1800" dirty="0"/>
           </a:p>
@@ -6970,13 +7715,13 @@
       </p:sp>
       <p:sp>
         <p:nvSpPr>
-          <p:cNvPr id="8" name="Text 6"/>
-          <p:cNvSpPr/>
-          <p:nvPr/>
-        </p:nvSpPr>
-        <p:spPr>
-          <a:xfrm>
-            <a:off x="896112" y="4576572"/>
+          <p:cNvPr id="9" name="Text 7"/>
+          <p:cNvSpPr/>
+          <p:nvPr/>
+        </p:nvSpPr>
+        <p:spPr>
+          <a:xfrm>
+            <a:off x="896112" y="4338828"/>
             <a:ext cx="10454335" cy="397764"/>
           </a:xfrm>
           <a:prstGeom prst="rect">
@@ -7018,7 +7763,7 @@
                   <a:srgbClr val="000000"/>
                 </a:solidFill>
               </a:rPr>
-              <a:t>指针版循环的边界：p走到a+4为止，写成a+5就多走一格</a:t>
+              <a:t>编译器多半不报错，值被悄悄改掉，错得无声无息</a:t>
             </a:r>
             <a:endParaRPr lang="en-US" sz="1800" dirty="0"/>
           </a:p>
@@ -7026,13 +7771,13 @@
       </p:sp>
       <p:sp>
         <p:nvSpPr>
-          <p:cNvPr id="9" name="Text 7"/>
-          <p:cNvSpPr/>
-          <p:nvPr/>
-        </p:nvSpPr>
-        <p:spPr>
-          <a:xfrm>
-            <a:off x="896112" y="5047488"/>
+          <p:cNvPr id="10" name="Text 8"/>
+          <p:cNvSpPr/>
+          <p:nvPr/>
+        </p:nvSpPr>
+        <p:spPr>
+          <a:xfrm>
+            <a:off x="896112" y="4809744"/>
             <a:ext cx="10454335" cy="397764"/>
           </a:xfrm>
           <a:prstGeom prst="rect">
@@ -7074,7 +7819,21 @@
                   <a:srgbClr val="000000"/>
                 </a:solidFill>
               </a:rPr>
-              <a:t>阅读题的循环边界挖空常考这一类，会画图就数得出来</a:t>
+              <a:t>越界危险的真正原因：</a:t>
+            </a:r>
+            <a:pPr algn="l" indent="0" marL="0">
+              <a:lnSpc>
+                <a:spcPct val="115000"/>
+              </a:lnSpc>
+              <a:buNone/>
+            </a:pPr>
+            <a:r>
+              <a:rPr lang="en-US" sz="1800" b="1" dirty="0">
+                <a:solidFill>
+                  <a:srgbClr val="000000"/>
+                </a:solidFill>
+              </a:rPr>
+              <a:t>不是程序不让，是那片内存不归你</a:t>
             </a:r>
             <a:endParaRPr lang="en-US" sz="1800" dirty="0"/>
           </a:p>

--- a/课件/C1/C1-B-02/C1-B-02.pptx
+++ b/课件/C1/C1-B-02/C1-B-02.pptx
@@ -7100,7 +7100,7 @@
                 <a:ea typeface="微软雅黑" pitchFamily="34" charset="-122"/>
                 <a:cs typeface="微软雅黑" pitchFamily="34" charset="-120"/>
               </a:rPr>
-              <a:t>下标法与指针法：一套逻辑，两种写法（配合讲稿用图讲指针走数组）</a:t>
+              <a:t>下标法与指针法：一套逻辑，两种写法</a:t>
             </a:r>
             <a:endParaRPr lang="en-US" sz="2800" dirty="0"/>
           </a:p>
